--- a/runtimetrust.pptx
+++ b/runtimetrust.pptx
@@ -5,15 +5,16 @@
     <p:sldMasterId id="2147483648" r:id="rId1"/>
   </p:sldMasterIdLst>
   <p:notesMasterIdLst>
-    <p:notesMasterId r:id="rId8"/>
+    <p:notesMasterId r:id="rId9"/>
   </p:notesMasterIdLst>
   <p:sldIdLst>
     <p:sldId id="256" r:id="rId2"/>
     <p:sldId id="257" r:id="rId3"/>
     <p:sldId id="258" r:id="rId4"/>
-    <p:sldId id="259" r:id="rId5"/>
-    <p:sldId id="260" r:id="rId6"/>
-    <p:sldId id="261" r:id="rId7"/>
+    <p:sldId id="262" r:id="rId5"/>
+    <p:sldId id="259" r:id="rId6"/>
+    <p:sldId id="260" r:id="rId7"/>
+    <p:sldId id="261" r:id="rId8"/>
   </p:sldIdLst>
   <p:sldSz cx="12192000" cy="6858000"/>
   <p:notesSz cx="6858000" cy="12192000"/>
@@ -746,6 +747,90 @@
 </p:notes>
 </file>
 
+<file path=ppt/notesSlides/notesSlide7.xml><?xml version="1.0" encoding="utf-8"?>
+<p:notes xmlns:a="http://schemas.openxmlformats.org/drawingml/2006/main" xmlns:r="http://schemas.openxmlformats.org/officeDocument/2006/relationships" xmlns:p="http://schemas.openxmlformats.org/presentationml/2006/main">
+  <p:cSld>
+    <p:spTree>
+      <p:nvGrpSpPr>
+        <p:cNvPr id="1" name=""/>
+        <p:cNvGrpSpPr/>
+        <p:nvPr/>
+      </p:nvGrpSpPr>
+      <p:grpSpPr>
+        <a:xfrm>
+          <a:off x="0" y="0"/>
+          <a:ext cx="0" cy="0"/>
+          <a:chOff x="0" y="0"/>
+          <a:chExt cx="0" cy="0"/>
+        </a:xfrm>
+      </p:grpSpPr>
+      <p:sp>
+        <p:nvSpPr>
+          <p:cNvPr id="2" name="Slide Image Placeholder 1"/>
+          <p:cNvSpPr>
+            <a:spLocks noGrp="1" noRot="1" noChangeAspect="1"/>
+          </p:cNvSpPr>
+          <p:nvPr>
+            <p:ph type="sldImg"/>
+          </p:nvPr>
+        </p:nvSpPr>
+        <p:spPr/>
+      </p:sp>
+      <p:sp>
+        <p:nvSpPr>
+          <p:cNvPr id="3" name="Notes Placeholder 2"/>
+          <p:cNvSpPr>
+            <a:spLocks noGrp="1"/>
+          </p:cNvSpPr>
+          <p:nvPr>
+            <p:ph type="body" idx="1"/>
+          </p:nvPr>
+        </p:nvSpPr>
+        <p:spPr/>
+        <p:txBody>
+          <a:bodyPr/>
+          <a:lstStyle/>
+          <a:p>
+            <a:endParaRPr lang="en-US" dirty="0"/>
+          </a:p>
+        </p:txBody>
+      </p:sp>
+      <p:sp>
+        <p:nvSpPr>
+          <p:cNvPr id="4" name="Slide Number Placeholder 3"/>
+          <p:cNvSpPr>
+            <a:spLocks noGrp="1"/>
+          </p:cNvSpPr>
+          <p:nvPr>
+            <p:ph type="sldNum" sz="quarter" idx="10"/>
+          </p:nvPr>
+        </p:nvSpPr>
+        <p:spPr/>
+        <p:txBody>
+          <a:bodyPr/>
+          <a:lstStyle/>
+          <a:p>
+            <a:fld id="{F7021451-1387-4CA6-816F-3879F97B5CBC}" type="slidenum">
+              <a:rPr lang="en-US"/>
+              <a:t>7</a:t>
+            </a:fld>
+            <a:endParaRPr lang="en-US"/>
+          </a:p>
+        </p:txBody>
+      </p:sp>
+    </p:spTree>
+    <p:extLst>
+      <p:ext uri="{BB962C8B-B14F-4D97-AF65-F5344CB8AC3E}">
+        <p14:creationId xmlns:p14="http://schemas.microsoft.com/office/powerpoint/2010/main" val="1024086991"/>
+      </p:ext>
+    </p:extLst>
+  </p:cSld>
+  <p:clrMapOvr>
+    <a:masterClrMapping/>
+  </p:clrMapOvr>
+</p:notes>
+</file>
+
 <file path=ppt/slideLayouts/slideLayout1.xml><?xml version="1.0" encoding="utf-8"?>
 <p:sldLayout xmlns:a="http://schemas.openxmlformats.org/drawingml/2006/main" xmlns:r="http://schemas.openxmlformats.org/officeDocument/2006/relationships" xmlns:p="http://schemas.openxmlformats.org/presentationml/2006/main" preserve="1">
   <p:cSld name="DEFAULT">
@@ -5604,6 +5689,3719 @@
 
 <file path=ppt/slides/slide4.xml><?xml version="1.0" encoding="utf-8"?>
 <p:sld xmlns:a="http://schemas.openxmlformats.org/drawingml/2006/main" xmlns:r="http://schemas.openxmlformats.org/officeDocument/2006/relationships" xmlns:p="http://schemas.openxmlformats.org/presentationml/2006/main">
+  <p:cSld>
+    <p:spTree>
+      <p:nvGrpSpPr>
+        <p:cNvPr id="1" name=""/>
+        <p:cNvGrpSpPr/>
+        <p:nvPr/>
+      </p:nvGrpSpPr>
+      <p:grpSpPr>
+        <a:xfrm>
+          <a:off x="0" y="0"/>
+          <a:ext cx="0" cy="0"/>
+          <a:chOff x="0" y="0"/>
+          <a:chExt cx="0" cy="0"/>
+        </a:xfrm>
+      </p:grpSpPr>
+      <p:sp>
+        <p:nvSpPr>
+          <p:cNvPr id="2" name="Text 0"/>
+          <p:cNvSpPr/>
+          <p:nvPr/>
+        </p:nvSpPr>
+        <p:spPr>
+          <a:xfrm>
+            <a:off x="487680" y="121920"/>
+            <a:ext cx="8534400" cy="536448"/>
+          </a:xfrm>
+          <a:prstGeom prst="rect">
+            <a:avLst/>
+          </a:prstGeom>
+          <a:noFill/>
+          <a:ln/>
+        </p:spPr>
+        <p:txBody>
+          <a:bodyPr wrap="square" rtlCol="0" anchor="ctr"/>
+          <a:lstStyle/>
+          <a:p>
+            <a:r>
+              <a:rPr lang="en-US" sz="3467" b="1" kern="0" spc="-67" dirty="0">
+                <a:solidFill>
+                  <a:srgbClr val="1D1D1F"/>
+                </a:solidFill>
+                <a:latin typeface="SF Pro Display, Arial" pitchFamily="34" charset="0"/>
+                <a:ea typeface="SF Pro Display, Arial" pitchFamily="34" charset="-122"/>
+                <a:cs typeface="SF Pro Display, Arial" pitchFamily="34" charset="-120"/>
+              </a:rPr>
+              <a:t>銀行 AI 事故——四層防護</a:t>
+            </a:r>
+            <a:endParaRPr lang="en-US" sz="3467" dirty="0"/>
+          </a:p>
+        </p:txBody>
+      </p:sp>
+      <p:sp>
+        <p:nvSpPr>
+          <p:cNvPr id="3" name="Text 1"/>
+          <p:cNvSpPr/>
+          <p:nvPr/>
+        </p:nvSpPr>
+        <p:spPr>
+          <a:xfrm>
+            <a:off x="6315456" y="223853"/>
+            <a:ext cx="6096000" cy="292608"/>
+          </a:xfrm>
+          <a:prstGeom prst="rect">
+            <a:avLst/>
+          </a:prstGeom>
+          <a:noFill/>
+          <a:ln/>
+        </p:spPr>
+        <p:txBody>
+          <a:bodyPr wrap="square" rtlCol="0" anchor="ctr"/>
+          <a:lstStyle/>
+          <a:p>
+            <a:r>
+              <a:rPr lang="en-US" sz="1467" dirty="0">
+                <a:solidFill>
+                  <a:srgbClr val="6E6E73"/>
+                </a:solidFill>
+                <a:latin typeface="Arial" pitchFamily="34" charset="0"/>
+                <a:ea typeface="Arial" pitchFamily="34" charset="-122"/>
+                <a:cs typeface="Arial" pitchFamily="34" charset="-120"/>
+              </a:rPr>
+              <a:t>RUNTIME TRUST · </a:t>
+            </a:r>
+            <a:r>
+              <a:rPr lang="en-US" sz="1467" dirty="0" err="1">
+                <a:solidFill>
+                  <a:srgbClr val="6E6E73"/>
+                </a:solidFill>
+                <a:latin typeface="Arial" pitchFamily="34" charset="0"/>
+                <a:ea typeface="Arial" pitchFamily="34" charset="-122"/>
+                <a:cs typeface="Arial" pitchFamily="34" charset="-120"/>
+              </a:rPr>
+              <a:t>解碼層防護</a:t>
+            </a:r>
+            <a:endParaRPr lang="en-US" sz="1467" dirty="0"/>
+          </a:p>
+        </p:txBody>
+      </p:sp>
+      <p:sp>
+        <p:nvSpPr>
+          <p:cNvPr id="4" name="Shape 2"/>
+          <p:cNvSpPr/>
+          <p:nvPr/>
+        </p:nvSpPr>
+        <p:spPr>
+          <a:xfrm>
+            <a:off x="9265920" y="146304"/>
+            <a:ext cx="2438400" cy="438912"/>
+          </a:xfrm>
+          <a:prstGeom prst="roundRect">
+            <a:avLst>
+              <a:gd name="adj" fmla="val 50000"/>
+            </a:avLst>
+          </a:prstGeom>
+          <a:solidFill>
+            <a:srgbClr val="0071E3"/>
+          </a:solidFill>
+          <a:ln w="12700">
+            <a:solidFill>
+              <a:srgbClr val="0071E3"/>
+            </a:solidFill>
+            <a:prstDash val="solid"/>
+          </a:ln>
+          <a:effectLst>
+            <a:outerShdw blurRad="152400" dist="50800" dir="8100000" algn="bl" rotWithShape="0">
+              <a:srgbClr val="000000">
+                <a:alpha val="8000"/>
+              </a:srgbClr>
+            </a:outerShdw>
+          </a:effectLst>
+        </p:spPr>
+        <p:txBody>
+          <a:bodyPr/>
+          <a:lstStyle/>
+          <a:p>
+            <a:endParaRPr lang="zh-TW" altLang="en-US" sz="2400"/>
+          </a:p>
+        </p:txBody>
+      </p:sp>
+      <p:sp>
+        <p:nvSpPr>
+          <p:cNvPr id="5" name="Text 3"/>
+          <p:cNvSpPr/>
+          <p:nvPr/>
+        </p:nvSpPr>
+        <p:spPr>
+          <a:xfrm>
+            <a:off x="9265920" y="146304"/>
+            <a:ext cx="2438400" cy="438912"/>
+          </a:xfrm>
+          <a:prstGeom prst="rect">
+            <a:avLst/>
+          </a:prstGeom>
+          <a:noFill/>
+          <a:ln/>
+        </p:spPr>
+        <p:txBody>
+          <a:bodyPr wrap="square" rtlCol="0" anchor="ctr"/>
+          <a:lstStyle/>
+          <a:p>
+            <a:pPr algn="ctr"/>
+            <a:r>
+              <a:rPr lang="en-US" sz="1333" b="1" dirty="0">
+                <a:solidFill>
+                  <a:srgbClr val="FFFFFF"/>
+                </a:solidFill>
+                <a:latin typeface="Arial" pitchFamily="34" charset="0"/>
+                <a:ea typeface="Arial" pitchFamily="34" charset="-122"/>
+                <a:cs typeface="Arial" pitchFamily="34" charset="-120"/>
+              </a:rPr>
+              <a:t>RUNTIME TRUST</a:t>
+            </a:r>
+            <a:endParaRPr lang="en-US" sz="1333" dirty="0"/>
+          </a:p>
+        </p:txBody>
+      </p:sp>
+      <p:sp>
+        <p:nvSpPr>
+          <p:cNvPr id="6" name="Shape 4"/>
+          <p:cNvSpPr/>
+          <p:nvPr/>
+        </p:nvSpPr>
+        <p:spPr>
+          <a:xfrm>
+            <a:off x="365760" y="778089"/>
+            <a:ext cx="11460480" cy="341376"/>
+          </a:xfrm>
+          <a:prstGeom prst="roundRect">
+            <a:avLst>
+              <a:gd name="adj" fmla="val 28571"/>
+            </a:avLst>
+          </a:prstGeom>
+          <a:solidFill>
+            <a:srgbClr val="E8E8ED"/>
+          </a:solidFill>
+          <a:ln w="12700">
+            <a:solidFill>
+              <a:srgbClr val="E8E8ED"/>
+            </a:solidFill>
+            <a:prstDash val="solid"/>
+          </a:ln>
+          <a:effectLst>
+            <a:outerShdw blurRad="152400" dist="50800" dir="8100000" algn="bl" rotWithShape="0">
+              <a:srgbClr val="000000">
+                <a:alpha val="8000"/>
+              </a:srgbClr>
+            </a:outerShdw>
+          </a:effectLst>
+        </p:spPr>
+        <p:txBody>
+          <a:bodyPr/>
+          <a:lstStyle/>
+          <a:p>
+            <a:endParaRPr lang="zh-TW" altLang="en-US" sz="2400"/>
+          </a:p>
+        </p:txBody>
+      </p:sp>
+      <p:sp>
+        <p:nvSpPr>
+          <p:cNvPr id="7" name="Text 5"/>
+          <p:cNvSpPr/>
+          <p:nvPr/>
+        </p:nvSpPr>
+        <p:spPr>
+          <a:xfrm>
+            <a:off x="609600" y="802473"/>
+            <a:ext cx="2682240" cy="146304"/>
+          </a:xfrm>
+          <a:prstGeom prst="rect">
+            <a:avLst/>
+          </a:prstGeom>
+          <a:noFill/>
+          <a:ln/>
+        </p:spPr>
+        <p:txBody>
+          <a:bodyPr wrap="square" rtlCol="0" anchor="ctr"/>
+          <a:lstStyle/>
+          <a:p>
+            <a:r>
+              <a:rPr lang="en-US" sz="1200" b="1" dirty="0">
+                <a:solidFill>
+                  <a:srgbClr val="0071E3"/>
+                </a:solidFill>
+                <a:latin typeface="Arial" pitchFamily="34" charset="0"/>
+                <a:ea typeface="Arial" pitchFamily="34" charset="-122"/>
+                <a:cs typeface="Arial" pitchFamily="34" charset="-120"/>
+              </a:rPr>
+              <a:t>41%</a:t>
+            </a:r>
+            <a:endParaRPr lang="en-US" sz="1200" dirty="0"/>
+          </a:p>
+        </p:txBody>
+      </p:sp>
+      <p:sp>
+        <p:nvSpPr>
+          <p:cNvPr id="8" name="Text 6"/>
+          <p:cNvSpPr/>
+          <p:nvPr/>
+        </p:nvSpPr>
+        <p:spPr>
+          <a:xfrm>
+            <a:off x="609600" y="948777"/>
+            <a:ext cx="2682240" cy="121920"/>
+          </a:xfrm>
+          <a:prstGeom prst="rect">
+            <a:avLst/>
+          </a:prstGeom>
+          <a:noFill/>
+          <a:ln/>
+        </p:spPr>
+        <p:txBody>
+          <a:bodyPr wrap="square" rtlCol="0" anchor="ctr"/>
+          <a:lstStyle/>
+          <a:p>
+            <a:r>
+              <a:rPr lang="en-US" sz="1000" dirty="0">
+                <a:solidFill>
+                  <a:srgbClr val="6E6E73"/>
+                </a:solidFill>
+                <a:latin typeface="Arial" pitchFamily="34" charset="0"/>
+                <a:ea typeface="Arial" pitchFamily="34" charset="-122"/>
+                <a:cs typeface="Arial" pitchFamily="34" charset="-120"/>
+              </a:rPr>
+              <a:t>金融查詢幻覺發生率</a:t>
+            </a:r>
+            <a:endParaRPr lang="en-US" sz="1000" dirty="0"/>
+          </a:p>
+        </p:txBody>
+      </p:sp>
+      <p:sp>
+        <p:nvSpPr>
+          <p:cNvPr id="9" name="Text 7"/>
+          <p:cNvSpPr/>
+          <p:nvPr/>
+        </p:nvSpPr>
+        <p:spPr>
+          <a:xfrm>
+            <a:off x="3474720" y="802473"/>
+            <a:ext cx="2682240" cy="146304"/>
+          </a:xfrm>
+          <a:prstGeom prst="rect">
+            <a:avLst/>
+          </a:prstGeom>
+          <a:noFill/>
+          <a:ln/>
+        </p:spPr>
+        <p:txBody>
+          <a:bodyPr wrap="square" rtlCol="0" anchor="ctr"/>
+          <a:lstStyle/>
+          <a:p>
+            <a:r>
+              <a:rPr lang="en-US" sz="1200" b="1" dirty="0">
+                <a:solidFill>
+                  <a:srgbClr val="0071E3"/>
+                </a:solidFill>
+                <a:latin typeface="Arial" pitchFamily="34" charset="0"/>
+                <a:ea typeface="Arial" pitchFamily="34" charset="-122"/>
+                <a:cs typeface="Arial" pitchFamily="34" charset="-120"/>
+              </a:rPr>
+              <a:t>5,000萬</a:t>
+            </a:r>
+            <a:endParaRPr lang="en-US" sz="1200" dirty="0"/>
+          </a:p>
+        </p:txBody>
+      </p:sp>
+      <p:sp>
+        <p:nvSpPr>
+          <p:cNvPr id="10" name="Text 8"/>
+          <p:cNvSpPr/>
+          <p:nvPr/>
+        </p:nvSpPr>
+        <p:spPr>
+          <a:xfrm>
+            <a:off x="3474720" y="948777"/>
+            <a:ext cx="2682240" cy="121920"/>
+          </a:xfrm>
+          <a:prstGeom prst="rect">
+            <a:avLst/>
+          </a:prstGeom>
+          <a:noFill/>
+          <a:ln/>
+        </p:spPr>
+        <p:txBody>
+          <a:bodyPr wrap="square" rtlCol="0" anchor="ctr"/>
+          <a:lstStyle/>
+          <a:p>
+            <a:r>
+              <a:rPr lang="en-US" sz="1000" dirty="0">
+                <a:solidFill>
+                  <a:srgbClr val="6E6E73"/>
+                </a:solidFill>
+                <a:latin typeface="Arial" pitchFamily="34" charset="0"/>
+                <a:ea typeface="Arial" pitchFamily="34" charset="-122"/>
+                <a:cs typeface="Arial" pitchFamily="34" charset="-120"/>
+              </a:rPr>
+              <a:t>BofA Erica 累計請求</a:t>
+            </a:r>
+            <a:endParaRPr lang="en-US" sz="1000" dirty="0"/>
+          </a:p>
+        </p:txBody>
+      </p:sp>
+      <p:sp>
+        <p:nvSpPr>
+          <p:cNvPr id="11" name="Text 9"/>
+          <p:cNvSpPr/>
+          <p:nvPr/>
+        </p:nvSpPr>
+        <p:spPr>
+          <a:xfrm>
+            <a:off x="6339840" y="802473"/>
+            <a:ext cx="2682240" cy="146304"/>
+          </a:xfrm>
+          <a:prstGeom prst="rect">
+            <a:avLst/>
+          </a:prstGeom>
+          <a:noFill/>
+          <a:ln/>
+        </p:spPr>
+        <p:txBody>
+          <a:bodyPr wrap="square" rtlCol="0" anchor="ctr"/>
+          <a:lstStyle/>
+          <a:p>
+            <a:r>
+              <a:rPr lang="en-US" sz="1200" b="1" dirty="0">
+                <a:solidFill>
+                  <a:srgbClr val="0071E3"/>
+                </a:solidFill>
+                <a:latin typeface="Arial" pitchFamily="34" charset="0"/>
+                <a:ea typeface="Arial" pitchFamily="34" charset="-122"/>
+                <a:cs typeface="Arial" pitchFamily="34" charset="-120"/>
+              </a:rPr>
+              <a:t>2026</a:t>
+            </a:r>
+            <a:endParaRPr lang="en-US" sz="1200" dirty="0"/>
+          </a:p>
+        </p:txBody>
+      </p:sp>
+      <p:sp>
+        <p:nvSpPr>
+          <p:cNvPr id="12" name="Text 10"/>
+          <p:cNvSpPr/>
+          <p:nvPr/>
+        </p:nvSpPr>
+        <p:spPr>
+          <a:xfrm>
+            <a:off x="6339840" y="948777"/>
+            <a:ext cx="2682240" cy="121920"/>
+          </a:xfrm>
+          <a:prstGeom prst="rect">
+            <a:avLst/>
+          </a:prstGeom>
+          <a:noFill/>
+          <a:ln/>
+        </p:spPr>
+        <p:txBody>
+          <a:bodyPr wrap="square" rtlCol="0" anchor="ctr"/>
+          <a:lstStyle/>
+          <a:p>
+            <a:r>
+              <a:rPr lang="en-US" sz="1000" dirty="0">
+                <a:solidFill>
+                  <a:srgbClr val="6E6E73"/>
+                </a:solidFill>
+                <a:latin typeface="Arial" pitchFamily="34" charset="0"/>
+                <a:ea typeface="Arial" pitchFamily="34" charset="-122"/>
+                <a:cs typeface="Arial" pitchFamily="34" charset="-120"/>
+              </a:rPr>
+              <a:t>FINRA 幻覺合規警示</a:t>
+            </a:r>
+            <a:endParaRPr lang="en-US" sz="1000" dirty="0"/>
+          </a:p>
+        </p:txBody>
+      </p:sp>
+      <p:sp>
+        <p:nvSpPr>
+          <p:cNvPr id="13" name="Text 11"/>
+          <p:cNvSpPr/>
+          <p:nvPr/>
+        </p:nvSpPr>
+        <p:spPr>
+          <a:xfrm>
+            <a:off x="9204960" y="802473"/>
+            <a:ext cx="2682240" cy="146304"/>
+          </a:xfrm>
+          <a:prstGeom prst="rect">
+            <a:avLst/>
+          </a:prstGeom>
+          <a:noFill/>
+          <a:ln/>
+        </p:spPr>
+        <p:txBody>
+          <a:bodyPr wrap="square" rtlCol="0" anchor="ctr"/>
+          <a:lstStyle/>
+          <a:p>
+            <a:r>
+              <a:rPr lang="en-US" sz="1200" b="1" dirty="0">
+                <a:solidFill>
+                  <a:srgbClr val="0071E3"/>
+                </a:solidFill>
+                <a:latin typeface="Arial" pitchFamily="34" charset="0"/>
+                <a:ea typeface="Arial" pitchFamily="34" charset="-122"/>
+                <a:cs typeface="Arial" pitchFamily="34" charset="-120"/>
+              </a:rPr>
+              <a:t>Lloyd's</a:t>
+            </a:r>
+            <a:endParaRPr lang="en-US" sz="1200" dirty="0"/>
+          </a:p>
+        </p:txBody>
+      </p:sp>
+      <p:sp>
+        <p:nvSpPr>
+          <p:cNvPr id="14" name="Text 12"/>
+          <p:cNvSpPr/>
+          <p:nvPr/>
+        </p:nvSpPr>
+        <p:spPr>
+          <a:xfrm>
+            <a:off x="9204960" y="948777"/>
+            <a:ext cx="2682240" cy="121920"/>
+          </a:xfrm>
+          <a:prstGeom prst="rect">
+            <a:avLst/>
+          </a:prstGeom>
+          <a:noFill/>
+          <a:ln/>
+        </p:spPr>
+        <p:txBody>
+          <a:bodyPr wrap="square" rtlCol="0" anchor="ctr"/>
+          <a:lstStyle/>
+          <a:p>
+            <a:r>
+              <a:rPr lang="en-US" sz="1000" dirty="0">
+                <a:solidFill>
+                  <a:srgbClr val="6E6E73"/>
+                </a:solidFill>
+                <a:latin typeface="Arial" pitchFamily="34" charset="0"/>
+                <a:ea typeface="Arial" pitchFamily="34" charset="-122"/>
+                <a:cs typeface="Arial" pitchFamily="34" charset="-120"/>
+              </a:rPr>
+              <a:t>已推出 AI 幻覺保險</a:t>
+            </a:r>
+            <a:endParaRPr lang="en-US" sz="1000" dirty="0"/>
+          </a:p>
+        </p:txBody>
+      </p:sp>
+      <p:sp>
+        <p:nvSpPr>
+          <p:cNvPr id="15" name="Shape 13"/>
+          <p:cNvSpPr/>
+          <p:nvPr/>
+        </p:nvSpPr>
+        <p:spPr>
+          <a:xfrm>
+            <a:off x="365760" y="1217001"/>
+            <a:ext cx="2779776" cy="4754880"/>
+          </a:xfrm>
+          <a:prstGeom prst="roundRect">
+            <a:avLst>
+              <a:gd name="adj" fmla="val 7018"/>
+            </a:avLst>
+          </a:prstGeom>
+          <a:solidFill>
+            <a:srgbClr val="FFFFFF"/>
+          </a:solidFill>
+          <a:ln w="6350">
+            <a:solidFill>
+              <a:srgbClr val="E8E8ED"/>
+            </a:solidFill>
+            <a:prstDash val="solid"/>
+          </a:ln>
+          <a:effectLst>
+            <a:outerShdw blurRad="152400" dist="50800" dir="8100000" algn="bl" rotWithShape="0">
+              <a:srgbClr val="000000">
+                <a:alpha val="8000"/>
+              </a:srgbClr>
+            </a:outerShdw>
+          </a:effectLst>
+        </p:spPr>
+        <p:txBody>
+          <a:bodyPr/>
+          <a:lstStyle/>
+          <a:p>
+            <a:endParaRPr lang="zh-TW" altLang="en-US" sz="2400"/>
+          </a:p>
+        </p:txBody>
+      </p:sp>
+      <p:sp>
+        <p:nvSpPr>
+          <p:cNvPr id="16" name="Shape 14"/>
+          <p:cNvSpPr/>
+          <p:nvPr/>
+        </p:nvSpPr>
+        <p:spPr>
+          <a:xfrm>
+            <a:off x="365760" y="1217001"/>
+            <a:ext cx="2779776" cy="560832"/>
+          </a:xfrm>
+          <a:prstGeom prst="roundRect">
+            <a:avLst>
+              <a:gd name="adj" fmla="val 30769"/>
+            </a:avLst>
+          </a:prstGeom>
+          <a:solidFill>
+            <a:srgbClr val="E8F1FD"/>
+          </a:solidFill>
+          <a:ln w="12700">
+            <a:solidFill>
+              <a:srgbClr val="E8F1FD"/>
+            </a:solidFill>
+            <a:prstDash val="solid"/>
+          </a:ln>
+          <a:effectLst>
+            <a:outerShdw blurRad="152400" dist="50800" dir="8100000" algn="bl" rotWithShape="0">
+              <a:srgbClr val="000000">
+                <a:alpha val="8000"/>
+              </a:srgbClr>
+            </a:outerShdw>
+          </a:effectLst>
+        </p:spPr>
+        <p:txBody>
+          <a:bodyPr/>
+          <a:lstStyle/>
+          <a:p>
+            <a:endParaRPr lang="zh-TW" altLang="en-US" sz="2400"/>
+          </a:p>
+        </p:txBody>
+      </p:sp>
+      <p:sp>
+        <p:nvSpPr>
+          <p:cNvPr id="17" name="Shape 15"/>
+          <p:cNvSpPr/>
+          <p:nvPr/>
+        </p:nvSpPr>
+        <p:spPr>
+          <a:xfrm>
+            <a:off x="365760" y="1680297"/>
+            <a:ext cx="2779776" cy="243840"/>
+          </a:xfrm>
+          <a:prstGeom prst="roundRect">
+            <a:avLst>
+              <a:gd name="adj" fmla="val 70000"/>
+            </a:avLst>
+          </a:prstGeom>
+          <a:solidFill>
+            <a:srgbClr val="E8F1FD"/>
+          </a:solidFill>
+          <a:ln w="12700">
+            <a:solidFill>
+              <a:srgbClr val="E8F1FD"/>
+            </a:solidFill>
+            <a:prstDash val="solid"/>
+          </a:ln>
+          <a:effectLst>
+            <a:outerShdw blurRad="152400" dist="50800" dir="8100000" algn="bl" rotWithShape="0">
+              <a:srgbClr val="000000">
+                <a:alpha val="8000"/>
+              </a:srgbClr>
+            </a:outerShdw>
+          </a:effectLst>
+        </p:spPr>
+        <p:txBody>
+          <a:bodyPr/>
+          <a:lstStyle/>
+          <a:p>
+            <a:endParaRPr lang="zh-TW" altLang="en-US" sz="2400"/>
+          </a:p>
+        </p:txBody>
+      </p:sp>
+      <p:sp>
+        <p:nvSpPr>
+          <p:cNvPr id="18" name="Shape 16"/>
+          <p:cNvSpPr/>
+          <p:nvPr/>
+        </p:nvSpPr>
+        <p:spPr>
+          <a:xfrm>
+            <a:off x="487680" y="1314537"/>
+            <a:ext cx="438912" cy="341376"/>
+          </a:xfrm>
+          <a:prstGeom prst="roundRect">
+            <a:avLst>
+              <a:gd name="adj" fmla="val 50000"/>
+            </a:avLst>
+          </a:prstGeom>
+          <a:solidFill>
+            <a:srgbClr val="0071E3"/>
+          </a:solidFill>
+          <a:ln w="12700">
+            <a:solidFill>
+              <a:srgbClr val="0071E3"/>
+            </a:solidFill>
+            <a:prstDash val="solid"/>
+          </a:ln>
+          <a:effectLst>
+            <a:outerShdw blurRad="152400" dist="50800" dir="8100000" algn="bl" rotWithShape="0">
+              <a:srgbClr val="000000">
+                <a:alpha val="8000"/>
+              </a:srgbClr>
+            </a:outerShdw>
+          </a:effectLst>
+        </p:spPr>
+        <p:txBody>
+          <a:bodyPr/>
+          <a:lstStyle/>
+          <a:p>
+            <a:endParaRPr lang="zh-TW" altLang="en-US" sz="2400"/>
+          </a:p>
+        </p:txBody>
+      </p:sp>
+      <p:sp>
+        <p:nvSpPr>
+          <p:cNvPr id="19" name="Text 17"/>
+          <p:cNvSpPr/>
+          <p:nvPr/>
+        </p:nvSpPr>
+        <p:spPr>
+          <a:xfrm>
+            <a:off x="487680" y="1314537"/>
+            <a:ext cx="438912" cy="341376"/>
+          </a:xfrm>
+          <a:prstGeom prst="rect">
+            <a:avLst/>
+          </a:prstGeom>
+          <a:noFill/>
+          <a:ln/>
+        </p:spPr>
+        <p:txBody>
+          <a:bodyPr wrap="square" rtlCol="0" anchor="ctr"/>
+          <a:lstStyle/>
+          <a:p>
+            <a:pPr algn="ctr"/>
+            <a:r>
+              <a:rPr lang="en-US" sz="1200" b="1" dirty="0">
+                <a:solidFill>
+                  <a:srgbClr val="FFFFFF"/>
+                </a:solidFill>
+              </a:rPr>
+              <a:t>01</a:t>
+            </a:r>
+            <a:endParaRPr lang="en-US" sz="1200" dirty="0"/>
+          </a:p>
+        </p:txBody>
+      </p:sp>
+      <p:sp>
+        <p:nvSpPr>
+          <p:cNvPr id="20" name="Text 18"/>
+          <p:cNvSpPr/>
+          <p:nvPr/>
+        </p:nvSpPr>
+        <p:spPr>
+          <a:xfrm>
+            <a:off x="999744" y="1302345"/>
+            <a:ext cx="2023872" cy="341376"/>
+          </a:xfrm>
+          <a:prstGeom prst="rect">
+            <a:avLst/>
+          </a:prstGeom>
+          <a:noFill/>
+          <a:ln/>
+        </p:spPr>
+        <p:txBody>
+          <a:bodyPr wrap="square" rtlCol="0" anchor="ctr"/>
+          <a:lstStyle/>
+          <a:p>
+            <a:r>
+              <a:rPr lang="en-US" sz="1733" b="1" dirty="0">
+                <a:solidFill>
+                  <a:srgbClr val="004AAD"/>
+                </a:solidFill>
+                <a:latin typeface="Arial" pitchFamily="34" charset="0"/>
+                <a:ea typeface="Arial" pitchFamily="34" charset="-122"/>
+                <a:cs typeface="Arial" pitchFamily="34" charset="-120"/>
+              </a:rPr>
+              <a:t>📋 記錄</a:t>
+            </a:r>
+            <a:endParaRPr lang="en-US" sz="1733" dirty="0"/>
+          </a:p>
+        </p:txBody>
+      </p:sp>
+      <p:sp>
+        <p:nvSpPr>
+          <p:cNvPr id="21" name="Text 19"/>
+          <p:cNvSpPr/>
+          <p:nvPr/>
+        </p:nvSpPr>
+        <p:spPr>
+          <a:xfrm>
+            <a:off x="999744" y="1560576"/>
+            <a:ext cx="2535936" cy="219456"/>
+          </a:xfrm>
+          <a:prstGeom prst="rect">
+            <a:avLst/>
+          </a:prstGeom>
+          <a:noFill/>
+          <a:ln/>
+        </p:spPr>
+        <p:txBody>
+          <a:bodyPr wrap="square" rtlCol="0" anchor="ctr"/>
+          <a:lstStyle/>
+          <a:p>
+            <a:r>
+              <a:rPr lang="en-US" sz="1000" i="1" dirty="0">
+                <a:solidFill>
+                  <a:srgbClr val="6E6E73"/>
+                </a:solidFill>
+                <a:latin typeface="Arial" pitchFamily="34" charset="0"/>
+                <a:ea typeface="Arial" pitchFamily="34" charset="-122"/>
+                <a:cs typeface="Arial" pitchFamily="34" charset="-120"/>
+              </a:rPr>
+              <a:t>沒有記錄就沒有證據</a:t>
+            </a:r>
+            <a:endParaRPr lang="en-US" sz="1000" dirty="0"/>
+          </a:p>
+        </p:txBody>
+      </p:sp>
+      <p:sp>
+        <p:nvSpPr>
+          <p:cNvPr id="22" name="Text 20"/>
+          <p:cNvSpPr/>
+          <p:nvPr/>
+        </p:nvSpPr>
+        <p:spPr>
+          <a:xfrm>
+            <a:off x="487680" y="1948521"/>
+            <a:ext cx="2535936" cy="0"/>
+          </a:xfrm>
+          <a:prstGeom prst="rect">
+            <a:avLst/>
+          </a:prstGeom>
+          <a:noFill/>
+          <a:ln/>
+        </p:spPr>
+        <p:txBody>
+          <a:bodyPr wrap="square" rtlCol="0" anchor="ctr"/>
+          <a:lstStyle/>
+          <a:p>
+            <a:endParaRPr lang="en-US" sz="2400" dirty="0"/>
+          </a:p>
+        </p:txBody>
+      </p:sp>
+      <p:sp>
+        <p:nvSpPr>
+          <p:cNvPr id="23" name="Shape 21"/>
+          <p:cNvSpPr/>
+          <p:nvPr/>
+        </p:nvSpPr>
+        <p:spPr>
+          <a:xfrm>
+            <a:off x="487680" y="1972905"/>
+            <a:ext cx="2535936" cy="219456"/>
+          </a:xfrm>
+          <a:prstGeom prst="roundRect">
+            <a:avLst>
+              <a:gd name="adj" fmla="val 33333"/>
+            </a:avLst>
+          </a:prstGeom>
+          <a:solidFill>
+            <a:srgbClr val="FFF0EF"/>
+          </a:solidFill>
+          <a:ln w="12700">
+            <a:solidFill>
+              <a:srgbClr val="FFF0EF"/>
+            </a:solidFill>
+            <a:prstDash val="solid"/>
+          </a:ln>
+          <a:effectLst>
+            <a:outerShdw blurRad="152400" dist="50800" dir="8100000" algn="bl" rotWithShape="0">
+              <a:srgbClr val="000000">
+                <a:alpha val="8000"/>
+              </a:srgbClr>
+            </a:outerShdw>
+          </a:effectLst>
+        </p:spPr>
+        <p:txBody>
+          <a:bodyPr/>
+          <a:lstStyle/>
+          <a:p>
+            <a:endParaRPr lang="zh-TW" altLang="en-US" sz="2400"/>
+          </a:p>
+        </p:txBody>
+      </p:sp>
+      <p:sp>
+        <p:nvSpPr>
+          <p:cNvPr id="24" name="Text 22"/>
+          <p:cNvSpPr/>
+          <p:nvPr/>
+        </p:nvSpPr>
+        <p:spPr>
+          <a:xfrm>
+            <a:off x="512064" y="1972905"/>
+            <a:ext cx="2487168" cy="219456"/>
+          </a:xfrm>
+          <a:prstGeom prst="rect">
+            <a:avLst/>
+          </a:prstGeom>
+          <a:noFill/>
+          <a:ln/>
+        </p:spPr>
+        <p:txBody>
+          <a:bodyPr wrap="square" rtlCol="0" anchor="ctr"/>
+          <a:lstStyle/>
+          <a:p>
+            <a:r>
+              <a:rPr lang="en-US" sz="1000" b="1" dirty="0">
+                <a:solidFill>
+                  <a:srgbClr val="FF3B30"/>
+                </a:solidFill>
+              </a:rPr>
+              <a:t>❌  현재 리스크</a:t>
+            </a:r>
+            <a:endParaRPr lang="en-US" sz="1000" dirty="0"/>
+          </a:p>
+        </p:txBody>
+      </p:sp>
+      <p:sp>
+        <p:nvSpPr>
+          <p:cNvPr id="25" name="Shape 23"/>
+          <p:cNvSpPr/>
+          <p:nvPr/>
+        </p:nvSpPr>
+        <p:spPr>
+          <a:xfrm>
+            <a:off x="487680" y="1972905"/>
+            <a:ext cx="2535936" cy="219456"/>
+          </a:xfrm>
+          <a:prstGeom prst="roundRect">
+            <a:avLst>
+              <a:gd name="adj" fmla="val 33333"/>
+            </a:avLst>
+          </a:prstGeom>
+          <a:solidFill>
+            <a:srgbClr val="FFF0EF"/>
+          </a:solidFill>
+          <a:ln w="12700">
+            <a:solidFill>
+              <a:srgbClr val="FFF0EF"/>
+            </a:solidFill>
+            <a:prstDash val="solid"/>
+          </a:ln>
+          <a:effectLst>
+            <a:outerShdw blurRad="152400" dist="50800" dir="8100000" algn="bl" rotWithShape="0">
+              <a:srgbClr val="000000">
+                <a:alpha val="8000"/>
+              </a:srgbClr>
+            </a:outerShdw>
+          </a:effectLst>
+        </p:spPr>
+        <p:txBody>
+          <a:bodyPr/>
+          <a:lstStyle/>
+          <a:p>
+            <a:endParaRPr lang="zh-TW" altLang="en-US" sz="2400"/>
+          </a:p>
+        </p:txBody>
+      </p:sp>
+      <p:sp>
+        <p:nvSpPr>
+          <p:cNvPr id="26" name="Text 24"/>
+          <p:cNvSpPr/>
+          <p:nvPr/>
+        </p:nvSpPr>
+        <p:spPr>
+          <a:xfrm>
+            <a:off x="512064" y="1972905"/>
+            <a:ext cx="2487168" cy="219456"/>
+          </a:xfrm>
+          <a:prstGeom prst="rect">
+            <a:avLst/>
+          </a:prstGeom>
+          <a:noFill/>
+          <a:ln/>
+        </p:spPr>
+        <p:txBody>
+          <a:bodyPr wrap="square" rtlCol="0" anchor="ctr"/>
+          <a:lstStyle/>
+          <a:p>
+            <a:r>
+              <a:rPr lang="en-US" sz="1000" b="1" dirty="0">
+                <a:solidFill>
+                  <a:srgbClr val="FF3B30"/>
+                </a:solidFill>
+              </a:rPr>
+              <a:t>❌  現在的風險</a:t>
+            </a:r>
+            <a:endParaRPr lang="en-US" sz="1000" dirty="0"/>
+          </a:p>
+        </p:txBody>
+      </p:sp>
+      <p:sp>
+        <p:nvSpPr>
+          <p:cNvPr id="27" name="Text 25"/>
+          <p:cNvSpPr/>
+          <p:nvPr/>
+        </p:nvSpPr>
+        <p:spPr>
+          <a:xfrm>
+            <a:off x="487680" y="2216745"/>
+            <a:ext cx="2535936" cy="1365504"/>
+          </a:xfrm>
+          <a:prstGeom prst="rect">
+            <a:avLst/>
+          </a:prstGeom>
+          <a:noFill/>
+          <a:ln/>
+        </p:spPr>
+        <p:txBody>
+          <a:bodyPr wrap="square" rtlCol="0" anchor="t"/>
+          <a:lstStyle/>
+          <a:p>
+            <a:r>
+              <a:rPr lang="en-US" sz="1133" dirty="0">
+                <a:solidFill>
+                  <a:srgbClr val="1D1D1F"/>
+                </a:solidFill>
+                <a:latin typeface="Arial" pitchFamily="34" charset="0"/>
+                <a:ea typeface="Arial" pitchFamily="34" charset="-122"/>
+                <a:cs typeface="Arial" pitchFamily="34" charset="-120"/>
+              </a:rPr>
+              <a:t>授信 AI 告訴客戶「利率 2.8%」，實際是 3.6%。客戶提告。銀行無法回答：推論過程是什麼？幻覺還是設計？</a:t>
+            </a:r>
+            <a:endParaRPr lang="en-US" sz="1133" dirty="0"/>
+          </a:p>
+        </p:txBody>
+      </p:sp>
+      <p:sp>
+        <p:nvSpPr>
+          <p:cNvPr id="28" name="Shape 26"/>
+          <p:cNvSpPr/>
+          <p:nvPr/>
+        </p:nvSpPr>
+        <p:spPr>
+          <a:xfrm>
+            <a:off x="609600" y="3071873"/>
+            <a:ext cx="2535936" cy="0"/>
+          </a:xfrm>
+          <a:prstGeom prst="line">
+            <a:avLst/>
+          </a:prstGeom>
+          <a:noFill/>
+          <a:ln w="7620">
+            <a:solidFill>
+              <a:srgbClr val="E8E8ED"/>
+            </a:solidFill>
+            <a:prstDash val="solid"/>
+          </a:ln>
+        </p:spPr>
+        <p:txBody>
+          <a:bodyPr/>
+          <a:lstStyle/>
+          <a:p>
+            <a:endParaRPr lang="zh-TW" altLang="en-US" sz="2400"/>
+          </a:p>
+        </p:txBody>
+      </p:sp>
+      <p:sp>
+        <p:nvSpPr>
+          <p:cNvPr id="29" name="Shape 27"/>
+          <p:cNvSpPr/>
+          <p:nvPr/>
+        </p:nvSpPr>
+        <p:spPr>
+          <a:xfrm>
+            <a:off x="487680" y="3111318"/>
+            <a:ext cx="2535936" cy="219456"/>
+          </a:xfrm>
+          <a:prstGeom prst="roundRect">
+            <a:avLst>
+              <a:gd name="adj" fmla="val 33333"/>
+            </a:avLst>
+          </a:prstGeom>
+          <a:solidFill>
+            <a:srgbClr val="E8F1FD"/>
+          </a:solidFill>
+          <a:ln w="12700">
+            <a:solidFill>
+              <a:srgbClr val="E8F1FD"/>
+            </a:solidFill>
+            <a:prstDash val="solid"/>
+          </a:ln>
+          <a:effectLst>
+            <a:outerShdw blurRad="152400" dist="50800" dir="8100000" algn="bl" rotWithShape="0">
+              <a:srgbClr val="000000">
+                <a:alpha val="8000"/>
+              </a:srgbClr>
+            </a:outerShdw>
+          </a:effectLst>
+        </p:spPr>
+        <p:txBody>
+          <a:bodyPr/>
+          <a:lstStyle/>
+          <a:p>
+            <a:endParaRPr lang="zh-TW" altLang="en-US" sz="2400"/>
+          </a:p>
+        </p:txBody>
+      </p:sp>
+      <p:sp>
+        <p:nvSpPr>
+          <p:cNvPr id="30" name="Text 28"/>
+          <p:cNvSpPr/>
+          <p:nvPr/>
+        </p:nvSpPr>
+        <p:spPr>
+          <a:xfrm>
+            <a:off x="512064" y="3111318"/>
+            <a:ext cx="2487168" cy="219456"/>
+          </a:xfrm>
+          <a:prstGeom prst="rect">
+            <a:avLst/>
+          </a:prstGeom>
+          <a:noFill/>
+          <a:ln/>
+        </p:spPr>
+        <p:txBody>
+          <a:bodyPr wrap="square" rtlCol="0" anchor="ctr"/>
+          <a:lstStyle/>
+          <a:p>
+            <a:r>
+              <a:rPr lang="en-US" sz="1000" b="1" dirty="0">
+                <a:solidFill>
+                  <a:srgbClr val="004AAD"/>
+                </a:solidFill>
+              </a:rPr>
+              <a:t>✅  RUNTIME TRUST</a:t>
+            </a:r>
+            <a:endParaRPr lang="en-US" sz="1000" dirty="0"/>
+          </a:p>
+        </p:txBody>
+      </p:sp>
+      <p:sp>
+        <p:nvSpPr>
+          <p:cNvPr id="31" name="Text 29"/>
+          <p:cNvSpPr/>
+          <p:nvPr/>
+        </p:nvSpPr>
+        <p:spPr>
+          <a:xfrm>
+            <a:off x="487680" y="3355158"/>
+            <a:ext cx="2535936" cy="1365504"/>
+          </a:xfrm>
+          <a:prstGeom prst="rect">
+            <a:avLst/>
+          </a:prstGeom>
+          <a:noFill/>
+          <a:ln/>
+        </p:spPr>
+        <p:txBody>
+          <a:bodyPr wrap="square" rtlCol="0" anchor="t"/>
+          <a:lstStyle/>
+          <a:p>
+            <a:r>
+              <a:rPr lang="en-US" sz="1133" dirty="0">
+                <a:solidFill>
+                  <a:srgbClr val="1D1D1F"/>
+                </a:solidFill>
+                <a:latin typeface="Arial" pitchFamily="34" charset="0"/>
+                <a:ea typeface="Arial" pitchFamily="34" charset="-122"/>
+                <a:cs typeface="Arial" pitchFamily="34" charset="-120"/>
+              </a:rPr>
+              <a:t>「2.8%」生成瞬間 Entropy 升高已記錄於 HMAC 稽核包。法庭調出：S1 知識盲區幻覺，非系統設計。責任立即釐清。</a:t>
+            </a:r>
+            <a:endParaRPr lang="en-US" sz="1133" dirty="0"/>
+          </a:p>
+        </p:txBody>
+      </p:sp>
+      <p:sp>
+        <p:nvSpPr>
+          <p:cNvPr id="32" name="Shape 30"/>
+          <p:cNvSpPr/>
+          <p:nvPr/>
+        </p:nvSpPr>
+        <p:spPr>
+          <a:xfrm>
+            <a:off x="487680" y="4793814"/>
+            <a:ext cx="2535936" cy="390144"/>
+          </a:xfrm>
+          <a:prstGeom prst="roundRect">
+            <a:avLst>
+              <a:gd name="adj" fmla="val 50000"/>
+            </a:avLst>
+          </a:prstGeom>
+          <a:solidFill>
+            <a:srgbClr val="0071E3"/>
+          </a:solidFill>
+          <a:ln w="12700">
+            <a:solidFill>
+              <a:srgbClr val="0071E3"/>
+            </a:solidFill>
+            <a:prstDash val="solid"/>
+          </a:ln>
+          <a:effectLst>
+            <a:outerShdw blurRad="152400" dist="50800" dir="8100000" algn="bl" rotWithShape="0">
+              <a:srgbClr val="000000">
+                <a:alpha val="8000"/>
+              </a:srgbClr>
+            </a:outerShdw>
+          </a:effectLst>
+        </p:spPr>
+        <p:txBody>
+          <a:bodyPr/>
+          <a:lstStyle/>
+          <a:p>
+            <a:endParaRPr lang="zh-TW" altLang="en-US" sz="2400"/>
+          </a:p>
+        </p:txBody>
+      </p:sp>
+      <p:sp>
+        <p:nvSpPr>
+          <p:cNvPr id="33" name="Text 31"/>
+          <p:cNvSpPr/>
+          <p:nvPr/>
+        </p:nvSpPr>
+        <p:spPr>
+          <a:xfrm>
+            <a:off x="487680" y="4793814"/>
+            <a:ext cx="2535936" cy="390144"/>
+          </a:xfrm>
+          <a:prstGeom prst="rect">
+            <a:avLst/>
+          </a:prstGeom>
+          <a:noFill/>
+          <a:ln/>
+        </p:spPr>
+        <p:txBody>
+          <a:bodyPr wrap="square" rtlCol="0" anchor="ctr"/>
+          <a:lstStyle/>
+          <a:p>
+            <a:pPr algn="ctr"/>
+            <a:r>
+              <a:rPr lang="en-US" sz="1200" b="1" dirty="0">
+                <a:solidFill>
+                  <a:srgbClr val="FFFFFF"/>
+                </a:solidFill>
+                <a:latin typeface="Arial" pitchFamily="34" charset="0"/>
+                <a:ea typeface="Arial" pitchFamily="34" charset="-122"/>
+                <a:cs typeface="Arial" pitchFamily="34" charset="-120"/>
+              </a:rPr>
+              <a:t>每個 token 即時存證</a:t>
+            </a:r>
+            <a:endParaRPr lang="en-US" sz="1200" dirty="0"/>
+          </a:p>
+        </p:txBody>
+      </p:sp>
+      <p:sp>
+        <p:nvSpPr>
+          <p:cNvPr id="34" name="Shape 32"/>
+          <p:cNvSpPr/>
+          <p:nvPr/>
+        </p:nvSpPr>
+        <p:spPr>
+          <a:xfrm>
+            <a:off x="3267456" y="1217001"/>
+            <a:ext cx="2779776" cy="4754880"/>
+          </a:xfrm>
+          <a:prstGeom prst="roundRect">
+            <a:avLst>
+              <a:gd name="adj" fmla="val 7018"/>
+            </a:avLst>
+          </a:prstGeom>
+          <a:solidFill>
+            <a:srgbClr val="FFFFFF"/>
+          </a:solidFill>
+          <a:ln w="6350">
+            <a:solidFill>
+              <a:srgbClr val="E8E8ED"/>
+            </a:solidFill>
+            <a:prstDash val="solid"/>
+          </a:ln>
+          <a:effectLst>
+            <a:outerShdw blurRad="152400" dist="50800" dir="8100000" algn="bl" rotWithShape="0">
+              <a:srgbClr val="000000">
+                <a:alpha val="8000"/>
+              </a:srgbClr>
+            </a:outerShdw>
+          </a:effectLst>
+        </p:spPr>
+        <p:txBody>
+          <a:bodyPr/>
+          <a:lstStyle/>
+          <a:p>
+            <a:endParaRPr lang="zh-TW" altLang="en-US" sz="2400"/>
+          </a:p>
+        </p:txBody>
+      </p:sp>
+      <p:sp>
+        <p:nvSpPr>
+          <p:cNvPr id="35" name="Shape 33"/>
+          <p:cNvSpPr/>
+          <p:nvPr/>
+        </p:nvSpPr>
+        <p:spPr>
+          <a:xfrm>
+            <a:off x="3267456" y="1217001"/>
+            <a:ext cx="2779776" cy="633984"/>
+          </a:xfrm>
+          <a:prstGeom prst="roundRect">
+            <a:avLst>
+              <a:gd name="adj" fmla="val 30769"/>
+            </a:avLst>
+          </a:prstGeom>
+          <a:solidFill>
+            <a:srgbClr val="FFF4E5"/>
+          </a:solidFill>
+          <a:ln w="12700">
+            <a:solidFill>
+              <a:srgbClr val="FFF4E5"/>
+            </a:solidFill>
+            <a:prstDash val="solid"/>
+          </a:ln>
+          <a:effectLst>
+            <a:outerShdw blurRad="152400" dist="50800" dir="8100000" algn="bl" rotWithShape="0">
+              <a:srgbClr val="000000">
+                <a:alpha val="8000"/>
+              </a:srgbClr>
+            </a:outerShdw>
+          </a:effectLst>
+        </p:spPr>
+        <p:txBody>
+          <a:bodyPr/>
+          <a:lstStyle/>
+          <a:p>
+            <a:endParaRPr lang="zh-TW" altLang="en-US" sz="2400"/>
+          </a:p>
+        </p:txBody>
+      </p:sp>
+      <p:sp>
+        <p:nvSpPr>
+          <p:cNvPr id="36" name="Shape 34"/>
+          <p:cNvSpPr/>
+          <p:nvPr/>
+        </p:nvSpPr>
+        <p:spPr>
+          <a:xfrm>
+            <a:off x="3267456" y="1680297"/>
+            <a:ext cx="2779776" cy="243840"/>
+          </a:xfrm>
+          <a:prstGeom prst="roundRect">
+            <a:avLst>
+              <a:gd name="adj" fmla="val 70000"/>
+            </a:avLst>
+          </a:prstGeom>
+          <a:solidFill>
+            <a:srgbClr val="FFF4E5"/>
+          </a:solidFill>
+          <a:ln w="12700">
+            <a:solidFill>
+              <a:srgbClr val="FFF4E5"/>
+            </a:solidFill>
+            <a:prstDash val="solid"/>
+          </a:ln>
+          <a:effectLst>
+            <a:outerShdw blurRad="152400" dist="50800" dir="8100000" algn="bl" rotWithShape="0">
+              <a:srgbClr val="000000">
+                <a:alpha val="8000"/>
+              </a:srgbClr>
+            </a:outerShdw>
+          </a:effectLst>
+        </p:spPr>
+        <p:txBody>
+          <a:bodyPr/>
+          <a:lstStyle/>
+          <a:p>
+            <a:endParaRPr lang="zh-TW" altLang="en-US" sz="2400"/>
+          </a:p>
+        </p:txBody>
+      </p:sp>
+      <p:sp>
+        <p:nvSpPr>
+          <p:cNvPr id="37" name="Shape 35"/>
+          <p:cNvSpPr/>
+          <p:nvPr/>
+        </p:nvSpPr>
+        <p:spPr>
+          <a:xfrm>
+            <a:off x="3389376" y="1314537"/>
+            <a:ext cx="438912" cy="341376"/>
+          </a:xfrm>
+          <a:prstGeom prst="roundRect">
+            <a:avLst>
+              <a:gd name="adj" fmla="val 50000"/>
+            </a:avLst>
+          </a:prstGeom>
+          <a:solidFill>
+            <a:srgbClr val="FF9500"/>
+          </a:solidFill>
+          <a:ln w="12700">
+            <a:solidFill>
+              <a:srgbClr val="FF9500"/>
+            </a:solidFill>
+            <a:prstDash val="solid"/>
+          </a:ln>
+          <a:effectLst>
+            <a:outerShdw blurRad="152400" dist="50800" dir="8100000" algn="bl" rotWithShape="0">
+              <a:srgbClr val="000000">
+                <a:alpha val="8000"/>
+              </a:srgbClr>
+            </a:outerShdw>
+          </a:effectLst>
+        </p:spPr>
+        <p:txBody>
+          <a:bodyPr/>
+          <a:lstStyle/>
+          <a:p>
+            <a:endParaRPr lang="zh-TW" altLang="en-US" sz="2400"/>
+          </a:p>
+        </p:txBody>
+      </p:sp>
+      <p:sp>
+        <p:nvSpPr>
+          <p:cNvPr id="38" name="Text 36"/>
+          <p:cNvSpPr/>
+          <p:nvPr/>
+        </p:nvSpPr>
+        <p:spPr>
+          <a:xfrm>
+            <a:off x="3389376" y="1314537"/>
+            <a:ext cx="438912" cy="341376"/>
+          </a:xfrm>
+          <a:prstGeom prst="rect">
+            <a:avLst/>
+          </a:prstGeom>
+          <a:noFill/>
+          <a:ln/>
+        </p:spPr>
+        <p:txBody>
+          <a:bodyPr wrap="square" rtlCol="0" anchor="ctr"/>
+          <a:lstStyle/>
+          <a:p>
+            <a:pPr algn="ctr"/>
+            <a:r>
+              <a:rPr lang="en-US" sz="1200" b="1" dirty="0">
+                <a:solidFill>
+                  <a:srgbClr val="FFFFFF"/>
+                </a:solidFill>
+              </a:rPr>
+              <a:t>02</a:t>
+            </a:r>
+            <a:endParaRPr lang="en-US" sz="1200" dirty="0"/>
+          </a:p>
+        </p:txBody>
+      </p:sp>
+      <p:sp>
+        <p:nvSpPr>
+          <p:cNvPr id="39" name="Text 37"/>
+          <p:cNvSpPr/>
+          <p:nvPr/>
+        </p:nvSpPr>
+        <p:spPr>
+          <a:xfrm>
+            <a:off x="3901440" y="1302345"/>
+            <a:ext cx="2023872" cy="341376"/>
+          </a:xfrm>
+          <a:prstGeom prst="rect">
+            <a:avLst/>
+          </a:prstGeom>
+          <a:noFill/>
+          <a:ln/>
+        </p:spPr>
+        <p:txBody>
+          <a:bodyPr wrap="square" rtlCol="0" anchor="ctr"/>
+          <a:lstStyle/>
+          <a:p>
+            <a:r>
+              <a:rPr lang="en-US" sz="1733" b="1" dirty="0">
+                <a:solidFill>
+                  <a:srgbClr val="CC7700"/>
+                </a:solidFill>
+                <a:latin typeface="Arial" pitchFamily="34" charset="0"/>
+                <a:ea typeface="Arial" pitchFamily="34" charset="-122"/>
+                <a:cs typeface="Arial" pitchFamily="34" charset="-120"/>
+              </a:rPr>
+              <a:t>⚡ 即時警示</a:t>
+            </a:r>
+            <a:endParaRPr lang="en-US" sz="1733" dirty="0"/>
+          </a:p>
+        </p:txBody>
+      </p:sp>
+      <p:sp>
+        <p:nvSpPr>
+          <p:cNvPr id="40" name="Text 38"/>
+          <p:cNvSpPr/>
+          <p:nvPr/>
+        </p:nvSpPr>
+        <p:spPr>
+          <a:xfrm>
+            <a:off x="3389376" y="1680297"/>
+            <a:ext cx="2535936" cy="219456"/>
+          </a:xfrm>
+          <a:prstGeom prst="rect">
+            <a:avLst/>
+          </a:prstGeom>
+          <a:noFill/>
+          <a:ln/>
+        </p:spPr>
+        <p:txBody>
+          <a:bodyPr wrap="square" rtlCol="0" anchor="ctr"/>
+          <a:lstStyle/>
+          <a:p>
+            <a:r>
+              <a:rPr lang="en-US" sz="1000" i="1" dirty="0">
+                <a:solidFill>
+                  <a:srgbClr val="6E6E73"/>
+                </a:solidFill>
+                <a:latin typeface="Arial" pitchFamily="34" charset="0"/>
+                <a:ea typeface="Arial" pitchFamily="34" charset="-122"/>
+                <a:cs typeface="Arial" pitchFamily="34" charset="-120"/>
+              </a:rPr>
+              <a:t>事前防禦比事後賠償便宜</a:t>
+            </a:r>
+            <a:endParaRPr lang="en-US" sz="1000" dirty="0"/>
+          </a:p>
+        </p:txBody>
+      </p:sp>
+      <p:sp>
+        <p:nvSpPr>
+          <p:cNvPr id="41" name="Text 39"/>
+          <p:cNvSpPr/>
+          <p:nvPr/>
+        </p:nvSpPr>
+        <p:spPr>
+          <a:xfrm>
+            <a:off x="3389376" y="1948521"/>
+            <a:ext cx="2535936" cy="0"/>
+          </a:xfrm>
+          <a:prstGeom prst="rect">
+            <a:avLst/>
+          </a:prstGeom>
+          <a:noFill/>
+          <a:ln/>
+        </p:spPr>
+        <p:txBody>
+          <a:bodyPr wrap="square" rtlCol="0" anchor="ctr"/>
+          <a:lstStyle/>
+          <a:p>
+            <a:endParaRPr lang="en-US" sz="2400" dirty="0"/>
+          </a:p>
+        </p:txBody>
+      </p:sp>
+      <p:sp>
+        <p:nvSpPr>
+          <p:cNvPr id="42" name="Shape 40"/>
+          <p:cNvSpPr/>
+          <p:nvPr/>
+        </p:nvSpPr>
+        <p:spPr>
+          <a:xfrm>
+            <a:off x="3389376" y="1972905"/>
+            <a:ext cx="2535936" cy="219456"/>
+          </a:xfrm>
+          <a:prstGeom prst="roundRect">
+            <a:avLst>
+              <a:gd name="adj" fmla="val 33333"/>
+            </a:avLst>
+          </a:prstGeom>
+          <a:solidFill>
+            <a:srgbClr val="FFF0EF"/>
+          </a:solidFill>
+          <a:ln w="12700">
+            <a:solidFill>
+              <a:srgbClr val="FFF0EF"/>
+            </a:solidFill>
+            <a:prstDash val="solid"/>
+          </a:ln>
+          <a:effectLst>
+            <a:outerShdw blurRad="152400" dist="50800" dir="8100000" algn="bl" rotWithShape="0">
+              <a:srgbClr val="000000">
+                <a:alpha val="8000"/>
+              </a:srgbClr>
+            </a:outerShdw>
+          </a:effectLst>
+        </p:spPr>
+        <p:txBody>
+          <a:bodyPr/>
+          <a:lstStyle/>
+          <a:p>
+            <a:endParaRPr lang="zh-TW" altLang="en-US" sz="2400"/>
+          </a:p>
+        </p:txBody>
+      </p:sp>
+      <p:sp>
+        <p:nvSpPr>
+          <p:cNvPr id="43" name="Text 41"/>
+          <p:cNvSpPr/>
+          <p:nvPr/>
+        </p:nvSpPr>
+        <p:spPr>
+          <a:xfrm>
+            <a:off x="3413760" y="1972905"/>
+            <a:ext cx="2487168" cy="219456"/>
+          </a:xfrm>
+          <a:prstGeom prst="rect">
+            <a:avLst/>
+          </a:prstGeom>
+          <a:noFill/>
+          <a:ln/>
+        </p:spPr>
+        <p:txBody>
+          <a:bodyPr wrap="square" rtlCol="0" anchor="ctr"/>
+          <a:lstStyle/>
+          <a:p>
+            <a:r>
+              <a:rPr lang="en-US" sz="1000" b="1" dirty="0">
+                <a:solidFill>
+                  <a:srgbClr val="FF3B30"/>
+                </a:solidFill>
+              </a:rPr>
+              <a:t>❌  현재 리스크</a:t>
+            </a:r>
+            <a:endParaRPr lang="en-US" sz="1000" dirty="0"/>
+          </a:p>
+        </p:txBody>
+      </p:sp>
+      <p:sp>
+        <p:nvSpPr>
+          <p:cNvPr id="44" name="Shape 42"/>
+          <p:cNvSpPr/>
+          <p:nvPr/>
+        </p:nvSpPr>
+        <p:spPr>
+          <a:xfrm>
+            <a:off x="3389376" y="1972905"/>
+            <a:ext cx="2535936" cy="219456"/>
+          </a:xfrm>
+          <a:prstGeom prst="roundRect">
+            <a:avLst>
+              <a:gd name="adj" fmla="val 33333"/>
+            </a:avLst>
+          </a:prstGeom>
+          <a:solidFill>
+            <a:srgbClr val="FFF0EF"/>
+          </a:solidFill>
+          <a:ln w="12700">
+            <a:solidFill>
+              <a:srgbClr val="FFF0EF"/>
+            </a:solidFill>
+            <a:prstDash val="solid"/>
+          </a:ln>
+          <a:effectLst>
+            <a:outerShdw blurRad="152400" dist="50800" dir="8100000" algn="bl" rotWithShape="0">
+              <a:srgbClr val="000000">
+                <a:alpha val="8000"/>
+              </a:srgbClr>
+            </a:outerShdw>
+          </a:effectLst>
+        </p:spPr>
+        <p:txBody>
+          <a:bodyPr/>
+          <a:lstStyle/>
+          <a:p>
+            <a:endParaRPr lang="zh-TW" altLang="en-US" sz="2400"/>
+          </a:p>
+        </p:txBody>
+      </p:sp>
+      <p:sp>
+        <p:nvSpPr>
+          <p:cNvPr id="45" name="Text 43"/>
+          <p:cNvSpPr/>
+          <p:nvPr/>
+        </p:nvSpPr>
+        <p:spPr>
+          <a:xfrm>
+            <a:off x="3413760" y="1972905"/>
+            <a:ext cx="2487168" cy="219456"/>
+          </a:xfrm>
+          <a:prstGeom prst="rect">
+            <a:avLst/>
+          </a:prstGeom>
+          <a:noFill/>
+          <a:ln/>
+        </p:spPr>
+        <p:txBody>
+          <a:bodyPr wrap="square" rtlCol="0" anchor="ctr"/>
+          <a:lstStyle/>
+          <a:p>
+            <a:r>
+              <a:rPr lang="en-US" sz="1000" b="1" dirty="0">
+                <a:solidFill>
+                  <a:srgbClr val="FF3B30"/>
+                </a:solidFill>
+              </a:rPr>
+              <a:t>❌  現在的風險</a:t>
+            </a:r>
+            <a:endParaRPr lang="en-US" sz="1000" dirty="0"/>
+          </a:p>
+        </p:txBody>
+      </p:sp>
+      <p:sp>
+        <p:nvSpPr>
+          <p:cNvPr id="46" name="Text 44"/>
+          <p:cNvSpPr/>
+          <p:nvPr/>
+        </p:nvSpPr>
+        <p:spPr>
+          <a:xfrm>
+            <a:off x="3389376" y="2216745"/>
+            <a:ext cx="2535936" cy="1365504"/>
+          </a:xfrm>
+          <a:prstGeom prst="rect">
+            <a:avLst/>
+          </a:prstGeom>
+          <a:noFill/>
+          <a:ln/>
+        </p:spPr>
+        <p:txBody>
+          <a:bodyPr wrap="square" rtlCol="0" anchor="t"/>
+          <a:lstStyle/>
+          <a:p>
+            <a:r>
+              <a:rPr lang="en-US" sz="1133" dirty="0">
+                <a:solidFill>
+                  <a:srgbClr val="1D1D1F"/>
+                </a:solidFill>
+                <a:latin typeface="Arial" pitchFamily="34" charset="0"/>
+                <a:ea typeface="Arial" pitchFamily="34" charset="-122"/>
+                <a:cs typeface="Arial" pitchFamily="34" charset="-120"/>
+              </a:rPr>
+              <a:t>AML 篩查 AI 遭 Prompt Injection。攻擊者讓 AI 誤判 $200 萬可疑交易為正常，不發 SAR 警報。47 分鐘後才發現。</a:t>
+            </a:r>
+            <a:endParaRPr lang="en-US" sz="1133" dirty="0"/>
+          </a:p>
+        </p:txBody>
+      </p:sp>
+      <p:sp>
+        <p:nvSpPr>
+          <p:cNvPr id="47" name="Shape 45"/>
+          <p:cNvSpPr/>
+          <p:nvPr/>
+        </p:nvSpPr>
+        <p:spPr>
+          <a:xfrm>
+            <a:off x="3389376" y="3038166"/>
+            <a:ext cx="2535936" cy="0"/>
+          </a:xfrm>
+          <a:prstGeom prst="line">
+            <a:avLst/>
+          </a:prstGeom>
+          <a:noFill/>
+          <a:ln w="7620">
+            <a:solidFill>
+              <a:srgbClr val="E8E8ED"/>
+            </a:solidFill>
+            <a:prstDash val="solid"/>
+          </a:ln>
+        </p:spPr>
+        <p:txBody>
+          <a:bodyPr/>
+          <a:lstStyle/>
+          <a:p>
+            <a:endParaRPr lang="zh-TW" altLang="en-US" sz="2400"/>
+          </a:p>
+        </p:txBody>
+      </p:sp>
+      <p:sp>
+        <p:nvSpPr>
+          <p:cNvPr id="48" name="Shape 46"/>
+          <p:cNvSpPr/>
+          <p:nvPr/>
+        </p:nvSpPr>
+        <p:spPr>
+          <a:xfrm>
+            <a:off x="3389376" y="3111318"/>
+            <a:ext cx="2535936" cy="219456"/>
+          </a:xfrm>
+          <a:prstGeom prst="roundRect">
+            <a:avLst>
+              <a:gd name="adj" fmla="val 33333"/>
+            </a:avLst>
+          </a:prstGeom>
+          <a:solidFill>
+            <a:srgbClr val="FFF4E5"/>
+          </a:solidFill>
+          <a:ln w="12700">
+            <a:solidFill>
+              <a:srgbClr val="FFF4E5"/>
+            </a:solidFill>
+            <a:prstDash val="solid"/>
+          </a:ln>
+          <a:effectLst>
+            <a:outerShdw blurRad="152400" dist="50800" dir="8100000" algn="bl" rotWithShape="0">
+              <a:srgbClr val="000000">
+                <a:alpha val="8000"/>
+              </a:srgbClr>
+            </a:outerShdw>
+          </a:effectLst>
+        </p:spPr>
+        <p:txBody>
+          <a:bodyPr/>
+          <a:lstStyle/>
+          <a:p>
+            <a:endParaRPr lang="zh-TW" altLang="en-US" sz="2400"/>
+          </a:p>
+        </p:txBody>
+      </p:sp>
+      <p:sp>
+        <p:nvSpPr>
+          <p:cNvPr id="49" name="Text 47"/>
+          <p:cNvSpPr/>
+          <p:nvPr/>
+        </p:nvSpPr>
+        <p:spPr>
+          <a:xfrm>
+            <a:off x="3413760" y="3111318"/>
+            <a:ext cx="2487168" cy="219456"/>
+          </a:xfrm>
+          <a:prstGeom prst="rect">
+            <a:avLst/>
+          </a:prstGeom>
+          <a:noFill/>
+          <a:ln/>
+        </p:spPr>
+        <p:txBody>
+          <a:bodyPr wrap="square" rtlCol="0" anchor="ctr"/>
+          <a:lstStyle/>
+          <a:p>
+            <a:r>
+              <a:rPr lang="en-US" sz="1000" b="1" dirty="0">
+                <a:solidFill>
+                  <a:srgbClr val="CC7700"/>
+                </a:solidFill>
+              </a:rPr>
+              <a:t>✅  RUNTIME TRUST</a:t>
+            </a:r>
+            <a:endParaRPr lang="en-US" sz="1000" dirty="0"/>
+          </a:p>
+        </p:txBody>
+      </p:sp>
+      <p:sp>
+        <p:nvSpPr>
+          <p:cNvPr id="50" name="Text 48"/>
+          <p:cNvSpPr/>
+          <p:nvPr/>
+        </p:nvSpPr>
+        <p:spPr>
+          <a:xfrm>
+            <a:off x="3389376" y="3355158"/>
+            <a:ext cx="2535936" cy="1365504"/>
+          </a:xfrm>
+          <a:prstGeom prst="rect">
+            <a:avLst/>
+          </a:prstGeom>
+          <a:noFill/>
+          <a:ln/>
+        </p:spPr>
+        <p:txBody>
+          <a:bodyPr wrap="square" rtlCol="0" anchor="t"/>
+          <a:lstStyle/>
+          <a:p>
+            <a:r>
+              <a:rPr lang="en-US" sz="1133" dirty="0">
+                <a:solidFill>
+                  <a:srgbClr val="1D1D1F"/>
+                </a:solidFill>
+                <a:latin typeface="Arial" pitchFamily="34" charset="0"/>
+                <a:ea typeface="Arial" pitchFamily="34" charset="-122"/>
+                <a:cs typeface="Arial" pitchFamily="34" charset="-120"/>
+              </a:rPr>
+              <a:t>Prompt Injection 讓 hidden state 偏移。Drift 特徵 &lt; 20μs 觸發 S3 熔斷，SAR 自動發出。攻擊失敗，記錄完整。</a:t>
+            </a:r>
+            <a:endParaRPr lang="en-US" sz="1133" dirty="0"/>
+          </a:p>
+        </p:txBody>
+      </p:sp>
+      <p:sp>
+        <p:nvSpPr>
+          <p:cNvPr id="51" name="Shape 49"/>
+          <p:cNvSpPr/>
+          <p:nvPr/>
+        </p:nvSpPr>
+        <p:spPr>
+          <a:xfrm>
+            <a:off x="3389376" y="4793814"/>
+            <a:ext cx="2535936" cy="390144"/>
+          </a:xfrm>
+          <a:prstGeom prst="roundRect">
+            <a:avLst>
+              <a:gd name="adj" fmla="val 50000"/>
+            </a:avLst>
+          </a:prstGeom>
+          <a:solidFill>
+            <a:srgbClr val="FF9500"/>
+          </a:solidFill>
+          <a:ln w="12700">
+            <a:solidFill>
+              <a:srgbClr val="FF9500"/>
+            </a:solidFill>
+            <a:prstDash val="solid"/>
+          </a:ln>
+          <a:effectLst>
+            <a:outerShdw blurRad="152400" dist="50800" dir="8100000" algn="bl" rotWithShape="0">
+              <a:srgbClr val="000000">
+                <a:alpha val="8000"/>
+              </a:srgbClr>
+            </a:outerShdw>
+          </a:effectLst>
+        </p:spPr>
+        <p:txBody>
+          <a:bodyPr/>
+          <a:lstStyle/>
+          <a:p>
+            <a:endParaRPr lang="zh-TW" altLang="en-US" sz="2400"/>
+          </a:p>
+        </p:txBody>
+      </p:sp>
+      <p:sp>
+        <p:nvSpPr>
+          <p:cNvPr id="52" name="Text 50"/>
+          <p:cNvSpPr/>
+          <p:nvPr/>
+        </p:nvSpPr>
+        <p:spPr>
+          <a:xfrm>
+            <a:off x="3389376" y="4793814"/>
+            <a:ext cx="2535936" cy="390144"/>
+          </a:xfrm>
+          <a:prstGeom prst="rect">
+            <a:avLst/>
+          </a:prstGeom>
+          <a:noFill/>
+          <a:ln/>
+        </p:spPr>
+        <p:txBody>
+          <a:bodyPr wrap="square" rtlCol="0" anchor="ctr"/>
+          <a:lstStyle/>
+          <a:p>
+            <a:pPr algn="ctr"/>
+            <a:r>
+              <a:rPr lang="en-US" sz="1200" b="1" dirty="0">
+                <a:solidFill>
+                  <a:srgbClr val="FFFFFF"/>
+                </a:solidFill>
+                <a:latin typeface="Arial" pitchFamily="34" charset="0"/>
+                <a:ea typeface="Arial" pitchFamily="34" charset="-122"/>
+                <a:cs typeface="Arial" pitchFamily="34" charset="-120"/>
+              </a:rPr>
+              <a:t>攔截時機 &lt; 20μs</a:t>
+            </a:r>
+            <a:endParaRPr lang="en-US" sz="1200" dirty="0"/>
+          </a:p>
+        </p:txBody>
+      </p:sp>
+      <p:sp>
+        <p:nvSpPr>
+          <p:cNvPr id="53" name="Shape 51"/>
+          <p:cNvSpPr/>
+          <p:nvPr/>
+        </p:nvSpPr>
+        <p:spPr>
+          <a:xfrm>
+            <a:off x="6169152" y="1217001"/>
+            <a:ext cx="2779776" cy="4754880"/>
+          </a:xfrm>
+          <a:prstGeom prst="roundRect">
+            <a:avLst>
+              <a:gd name="adj" fmla="val 7018"/>
+            </a:avLst>
+          </a:prstGeom>
+          <a:solidFill>
+            <a:srgbClr val="FFFFFF"/>
+          </a:solidFill>
+          <a:ln w="6350">
+            <a:solidFill>
+              <a:srgbClr val="E8E8ED"/>
+            </a:solidFill>
+            <a:prstDash val="solid"/>
+          </a:ln>
+          <a:effectLst>
+            <a:outerShdw blurRad="152400" dist="50800" dir="8100000" algn="bl" rotWithShape="0">
+              <a:srgbClr val="000000">
+                <a:alpha val="8000"/>
+              </a:srgbClr>
+            </a:outerShdw>
+          </a:effectLst>
+        </p:spPr>
+        <p:txBody>
+          <a:bodyPr/>
+          <a:lstStyle/>
+          <a:p>
+            <a:endParaRPr lang="zh-TW" altLang="en-US" sz="2400"/>
+          </a:p>
+        </p:txBody>
+      </p:sp>
+      <p:sp>
+        <p:nvSpPr>
+          <p:cNvPr id="54" name="Shape 52"/>
+          <p:cNvSpPr/>
+          <p:nvPr/>
+        </p:nvSpPr>
+        <p:spPr>
+          <a:xfrm>
+            <a:off x="6169152" y="1217001"/>
+            <a:ext cx="2779776" cy="633984"/>
+          </a:xfrm>
+          <a:prstGeom prst="roundRect">
+            <a:avLst>
+              <a:gd name="adj" fmla="val 30769"/>
+            </a:avLst>
+          </a:prstGeom>
+          <a:solidFill>
+            <a:srgbClr val="E8F8EC"/>
+          </a:solidFill>
+          <a:ln w="12700">
+            <a:solidFill>
+              <a:srgbClr val="E8F8EC"/>
+            </a:solidFill>
+            <a:prstDash val="solid"/>
+          </a:ln>
+          <a:effectLst>
+            <a:outerShdw blurRad="152400" dist="50800" dir="8100000" algn="bl" rotWithShape="0">
+              <a:srgbClr val="000000">
+                <a:alpha val="8000"/>
+              </a:srgbClr>
+            </a:outerShdw>
+          </a:effectLst>
+        </p:spPr>
+        <p:txBody>
+          <a:bodyPr/>
+          <a:lstStyle/>
+          <a:p>
+            <a:endParaRPr lang="zh-TW" altLang="en-US" sz="2400"/>
+          </a:p>
+        </p:txBody>
+      </p:sp>
+      <p:sp>
+        <p:nvSpPr>
+          <p:cNvPr id="55" name="Shape 53"/>
+          <p:cNvSpPr/>
+          <p:nvPr/>
+        </p:nvSpPr>
+        <p:spPr>
+          <a:xfrm>
+            <a:off x="6169152" y="1680297"/>
+            <a:ext cx="2779776" cy="243840"/>
+          </a:xfrm>
+          <a:prstGeom prst="roundRect">
+            <a:avLst>
+              <a:gd name="adj" fmla="val 70000"/>
+            </a:avLst>
+          </a:prstGeom>
+          <a:solidFill>
+            <a:srgbClr val="E8F8EC"/>
+          </a:solidFill>
+          <a:ln w="12700">
+            <a:solidFill>
+              <a:srgbClr val="E8F8EC"/>
+            </a:solidFill>
+            <a:prstDash val="solid"/>
+          </a:ln>
+          <a:effectLst>
+            <a:outerShdw blurRad="152400" dist="50800" dir="8100000" algn="bl" rotWithShape="0">
+              <a:srgbClr val="000000">
+                <a:alpha val="8000"/>
+              </a:srgbClr>
+            </a:outerShdw>
+          </a:effectLst>
+        </p:spPr>
+        <p:txBody>
+          <a:bodyPr/>
+          <a:lstStyle/>
+          <a:p>
+            <a:endParaRPr lang="zh-TW" altLang="en-US" sz="2400"/>
+          </a:p>
+        </p:txBody>
+      </p:sp>
+      <p:sp>
+        <p:nvSpPr>
+          <p:cNvPr id="56" name="Shape 54"/>
+          <p:cNvSpPr/>
+          <p:nvPr/>
+        </p:nvSpPr>
+        <p:spPr>
+          <a:xfrm>
+            <a:off x="6291072" y="1314537"/>
+            <a:ext cx="438912" cy="341376"/>
+          </a:xfrm>
+          <a:prstGeom prst="roundRect">
+            <a:avLst>
+              <a:gd name="adj" fmla="val 50000"/>
+            </a:avLst>
+          </a:prstGeom>
+          <a:solidFill>
+            <a:srgbClr val="34C759"/>
+          </a:solidFill>
+          <a:ln w="12700">
+            <a:solidFill>
+              <a:srgbClr val="34C759"/>
+            </a:solidFill>
+            <a:prstDash val="solid"/>
+          </a:ln>
+          <a:effectLst>
+            <a:outerShdw blurRad="152400" dist="50800" dir="8100000" algn="bl" rotWithShape="0">
+              <a:srgbClr val="000000">
+                <a:alpha val="8000"/>
+              </a:srgbClr>
+            </a:outerShdw>
+          </a:effectLst>
+        </p:spPr>
+        <p:txBody>
+          <a:bodyPr/>
+          <a:lstStyle/>
+          <a:p>
+            <a:endParaRPr lang="zh-TW" altLang="en-US" sz="2400"/>
+          </a:p>
+        </p:txBody>
+      </p:sp>
+      <p:sp>
+        <p:nvSpPr>
+          <p:cNvPr id="57" name="Text 55"/>
+          <p:cNvSpPr/>
+          <p:nvPr/>
+        </p:nvSpPr>
+        <p:spPr>
+          <a:xfrm>
+            <a:off x="6291072" y="1314537"/>
+            <a:ext cx="438912" cy="341376"/>
+          </a:xfrm>
+          <a:prstGeom prst="rect">
+            <a:avLst/>
+          </a:prstGeom>
+          <a:noFill/>
+          <a:ln/>
+        </p:spPr>
+        <p:txBody>
+          <a:bodyPr wrap="square" rtlCol="0" anchor="ctr"/>
+          <a:lstStyle/>
+          <a:p>
+            <a:pPr algn="ctr"/>
+            <a:r>
+              <a:rPr lang="en-US" sz="1200" b="1" dirty="0">
+                <a:solidFill>
+                  <a:srgbClr val="FFFFFF"/>
+                </a:solidFill>
+              </a:rPr>
+              <a:t>03</a:t>
+            </a:r>
+            <a:endParaRPr lang="en-US" sz="1200" dirty="0"/>
+          </a:p>
+        </p:txBody>
+      </p:sp>
+      <p:sp>
+        <p:nvSpPr>
+          <p:cNvPr id="58" name="Text 56"/>
+          <p:cNvSpPr/>
+          <p:nvPr/>
+        </p:nvSpPr>
+        <p:spPr>
+          <a:xfrm>
+            <a:off x="6803136" y="1302345"/>
+            <a:ext cx="2023872" cy="341376"/>
+          </a:xfrm>
+          <a:prstGeom prst="rect">
+            <a:avLst/>
+          </a:prstGeom>
+          <a:noFill/>
+          <a:ln/>
+        </p:spPr>
+        <p:txBody>
+          <a:bodyPr wrap="square" rtlCol="0" anchor="ctr"/>
+          <a:lstStyle/>
+          <a:p>
+            <a:r>
+              <a:rPr lang="en-US" sz="1733" b="1" dirty="0">
+                <a:solidFill>
+                  <a:srgbClr val="248A3D"/>
+                </a:solidFill>
+                <a:latin typeface="Arial" pitchFamily="34" charset="0"/>
+                <a:ea typeface="Arial" pitchFamily="34" charset="-122"/>
+                <a:cs typeface="Arial" pitchFamily="34" charset="-120"/>
+              </a:rPr>
+              <a:t>🔍 事後還原</a:t>
+            </a:r>
+            <a:endParaRPr lang="en-US" sz="1733" dirty="0"/>
+          </a:p>
+        </p:txBody>
+      </p:sp>
+      <p:sp>
+        <p:nvSpPr>
+          <p:cNvPr id="59" name="Text 57"/>
+          <p:cNvSpPr/>
+          <p:nvPr/>
+        </p:nvSpPr>
+        <p:spPr>
+          <a:xfrm>
+            <a:off x="6291072" y="1680297"/>
+            <a:ext cx="2535936" cy="219456"/>
+          </a:xfrm>
+          <a:prstGeom prst="rect">
+            <a:avLst/>
+          </a:prstGeom>
+          <a:noFill/>
+          <a:ln/>
+        </p:spPr>
+        <p:txBody>
+          <a:bodyPr wrap="square" rtlCol="0" anchor="ctr"/>
+          <a:lstStyle/>
+          <a:p>
+            <a:r>
+              <a:rPr lang="en-US" sz="1000" i="1" dirty="0">
+                <a:solidFill>
+                  <a:srgbClr val="6E6E73"/>
+                </a:solidFill>
+                <a:latin typeface="Arial" pitchFamily="34" charset="0"/>
+                <a:ea typeface="Arial" pitchFamily="34" charset="-122"/>
+                <a:cs typeface="Arial" pitchFamily="34" charset="-120"/>
+              </a:rPr>
+              <a:t>FINRA 查核，說不清楚</a:t>
+            </a:r>
+            <a:endParaRPr lang="en-US" sz="1000" dirty="0"/>
+          </a:p>
+        </p:txBody>
+      </p:sp>
+      <p:sp>
+        <p:nvSpPr>
+          <p:cNvPr id="60" name="Text 58"/>
+          <p:cNvSpPr/>
+          <p:nvPr/>
+        </p:nvSpPr>
+        <p:spPr>
+          <a:xfrm>
+            <a:off x="6291072" y="1948521"/>
+            <a:ext cx="2535936" cy="0"/>
+          </a:xfrm>
+          <a:prstGeom prst="rect">
+            <a:avLst/>
+          </a:prstGeom>
+          <a:noFill/>
+          <a:ln/>
+        </p:spPr>
+        <p:txBody>
+          <a:bodyPr wrap="square" rtlCol="0" anchor="ctr"/>
+          <a:lstStyle/>
+          <a:p>
+            <a:endParaRPr lang="en-US" sz="2400" dirty="0"/>
+          </a:p>
+        </p:txBody>
+      </p:sp>
+      <p:sp>
+        <p:nvSpPr>
+          <p:cNvPr id="61" name="Shape 59"/>
+          <p:cNvSpPr/>
+          <p:nvPr/>
+        </p:nvSpPr>
+        <p:spPr>
+          <a:xfrm>
+            <a:off x="6291072" y="1972905"/>
+            <a:ext cx="2535936" cy="219456"/>
+          </a:xfrm>
+          <a:prstGeom prst="roundRect">
+            <a:avLst>
+              <a:gd name="adj" fmla="val 33333"/>
+            </a:avLst>
+          </a:prstGeom>
+          <a:solidFill>
+            <a:srgbClr val="FFF0EF"/>
+          </a:solidFill>
+          <a:ln w="12700">
+            <a:solidFill>
+              <a:srgbClr val="FFF0EF"/>
+            </a:solidFill>
+            <a:prstDash val="solid"/>
+          </a:ln>
+          <a:effectLst>
+            <a:outerShdw blurRad="152400" dist="50800" dir="8100000" algn="bl" rotWithShape="0">
+              <a:srgbClr val="000000">
+                <a:alpha val="8000"/>
+              </a:srgbClr>
+            </a:outerShdw>
+          </a:effectLst>
+        </p:spPr>
+        <p:txBody>
+          <a:bodyPr/>
+          <a:lstStyle/>
+          <a:p>
+            <a:endParaRPr lang="zh-TW" altLang="en-US" sz="2400"/>
+          </a:p>
+        </p:txBody>
+      </p:sp>
+      <p:sp>
+        <p:nvSpPr>
+          <p:cNvPr id="62" name="Text 60"/>
+          <p:cNvSpPr/>
+          <p:nvPr/>
+        </p:nvSpPr>
+        <p:spPr>
+          <a:xfrm>
+            <a:off x="6315456" y="1972905"/>
+            <a:ext cx="2487168" cy="219456"/>
+          </a:xfrm>
+          <a:prstGeom prst="rect">
+            <a:avLst/>
+          </a:prstGeom>
+          <a:noFill/>
+          <a:ln/>
+        </p:spPr>
+        <p:txBody>
+          <a:bodyPr wrap="square" rtlCol="0" anchor="ctr"/>
+          <a:lstStyle/>
+          <a:p>
+            <a:r>
+              <a:rPr lang="en-US" sz="1000" b="1" dirty="0">
+                <a:solidFill>
+                  <a:srgbClr val="FF3B30"/>
+                </a:solidFill>
+              </a:rPr>
+              <a:t>❌  현재 리스크</a:t>
+            </a:r>
+            <a:endParaRPr lang="en-US" sz="1000" dirty="0"/>
+          </a:p>
+        </p:txBody>
+      </p:sp>
+      <p:sp>
+        <p:nvSpPr>
+          <p:cNvPr id="63" name="Shape 61"/>
+          <p:cNvSpPr/>
+          <p:nvPr/>
+        </p:nvSpPr>
+        <p:spPr>
+          <a:xfrm>
+            <a:off x="6291072" y="1972905"/>
+            <a:ext cx="2535936" cy="219456"/>
+          </a:xfrm>
+          <a:prstGeom prst="roundRect">
+            <a:avLst>
+              <a:gd name="adj" fmla="val 33333"/>
+            </a:avLst>
+          </a:prstGeom>
+          <a:solidFill>
+            <a:srgbClr val="FFF0EF"/>
+          </a:solidFill>
+          <a:ln w="12700">
+            <a:solidFill>
+              <a:srgbClr val="FFF0EF"/>
+            </a:solidFill>
+            <a:prstDash val="solid"/>
+          </a:ln>
+          <a:effectLst>
+            <a:outerShdw blurRad="152400" dist="50800" dir="8100000" algn="bl" rotWithShape="0">
+              <a:srgbClr val="000000">
+                <a:alpha val="8000"/>
+              </a:srgbClr>
+            </a:outerShdw>
+          </a:effectLst>
+        </p:spPr>
+        <p:txBody>
+          <a:bodyPr/>
+          <a:lstStyle/>
+          <a:p>
+            <a:endParaRPr lang="zh-TW" altLang="en-US" sz="2400"/>
+          </a:p>
+        </p:txBody>
+      </p:sp>
+      <p:sp>
+        <p:nvSpPr>
+          <p:cNvPr id="64" name="Text 62"/>
+          <p:cNvSpPr/>
+          <p:nvPr/>
+        </p:nvSpPr>
+        <p:spPr>
+          <a:xfrm>
+            <a:off x="6315456" y="1972905"/>
+            <a:ext cx="2487168" cy="219456"/>
+          </a:xfrm>
+          <a:prstGeom prst="rect">
+            <a:avLst/>
+          </a:prstGeom>
+          <a:noFill/>
+          <a:ln/>
+        </p:spPr>
+        <p:txBody>
+          <a:bodyPr wrap="square" rtlCol="0" anchor="ctr"/>
+          <a:lstStyle/>
+          <a:p>
+            <a:r>
+              <a:rPr lang="en-US" sz="1000" b="1" dirty="0">
+                <a:solidFill>
+                  <a:srgbClr val="FF3B30"/>
+                </a:solidFill>
+              </a:rPr>
+              <a:t>❌  現在的風險</a:t>
+            </a:r>
+            <a:endParaRPr lang="en-US" sz="1000" dirty="0"/>
+          </a:p>
+        </p:txBody>
+      </p:sp>
+      <p:sp>
+        <p:nvSpPr>
+          <p:cNvPr id="65" name="Text 63"/>
+          <p:cNvSpPr/>
+          <p:nvPr/>
+        </p:nvSpPr>
+        <p:spPr>
+          <a:xfrm>
+            <a:off x="6291072" y="2216745"/>
+            <a:ext cx="2535936" cy="1365504"/>
+          </a:xfrm>
+          <a:prstGeom prst="rect">
+            <a:avLst/>
+          </a:prstGeom>
+          <a:noFill/>
+          <a:ln/>
+        </p:spPr>
+        <p:txBody>
+          <a:bodyPr wrap="square" rtlCol="0" anchor="t"/>
+          <a:lstStyle/>
+          <a:p>
+            <a:r>
+              <a:rPr lang="en-US" sz="1133" dirty="0">
+                <a:solidFill>
+                  <a:srgbClr val="1D1D1F"/>
+                </a:solidFill>
+                <a:latin typeface="Arial" pitchFamily="34" charset="0"/>
+                <a:ea typeface="Arial" pitchFamily="34" charset="-122"/>
+                <a:cs typeface="Arial" pitchFamily="34" charset="-120"/>
+              </a:rPr>
+              <a:t>FINRA 要求：「過去 12 個月 AI 授信，有多少是模型不確定但仍輸出的？」沒有 token 層記錄，查核從 2 週拖到 6 個月。</a:t>
+            </a:r>
+            <a:endParaRPr lang="en-US" sz="1133" dirty="0"/>
+          </a:p>
+        </p:txBody>
+      </p:sp>
+      <p:sp>
+        <p:nvSpPr>
+          <p:cNvPr id="66" name="Shape 64"/>
+          <p:cNvSpPr/>
+          <p:nvPr/>
+        </p:nvSpPr>
+        <p:spPr>
+          <a:xfrm>
+            <a:off x="6291072" y="3038166"/>
+            <a:ext cx="2535936" cy="0"/>
+          </a:xfrm>
+          <a:prstGeom prst="line">
+            <a:avLst/>
+          </a:prstGeom>
+          <a:noFill/>
+          <a:ln w="7620">
+            <a:solidFill>
+              <a:srgbClr val="E8E8ED"/>
+            </a:solidFill>
+            <a:prstDash val="solid"/>
+          </a:ln>
+        </p:spPr>
+        <p:txBody>
+          <a:bodyPr/>
+          <a:lstStyle/>
+          <a:p>
+            <a:endParaRPr lang="zh-TW" altLang="en-US" sz="2400"/>
+          </a:p>
+        </p:txBody>
+      </p:sp>
+      <p:sp>
+        <p:nvSpPr>
+          <p:cNvPr id="67" name="Shape 65"/>
+          <p:cNvSpPr/>
+          <p:nvPr/>
+        </p:nvSpPr>
+        <p:spPr>
+          <a:xfrm>
+            <a:off x="6291072" y="3111318"/>
+            <a:ext cx="2535936" cy="219456"/>
+          </a:xfrm>
+          <a:prstGeom prst="roundRect">
+            <a:avLst>
+              <a:gd name="adj" fmla="val 33333"/>
+            </a:avLst>
+          </a:prstGeom>
+          <a:solidFill>
+            <a:srgbClr val="E8F8EC"/>
+          </a:solidFill>
+          <a:ln w="12700">
+            <a:solidFill>
+              <a:srgbClr val="E8F8EC"/>
+            </a:solidFill>
+            <a:prstDash val="solid"/>
+          </a:ln>
+          <a:effectLst>
+            <a:outerShdw blurRad="152400" dist="50800" dir="8100000" algn="bl" rotWithShape="0">
+              <a:srgbClr val="000000">
+                <a:alpha val="8000"/>
+              </a:srgbClr>
+            </a:outerShdw>
+          </a:effectLst>
+        </p:spPr>
+        <p:txBody>
+          <a:bodyPr/>
+          <a:lstStyle/>
+          <a:p>
+            <a:endParaRPr lang="zh-TW" altLang="en-US" sz="2400"/>
+          </a:p>
+        </p:txBody>
+      </p:sp>
+      <p:sp>
+        <p:nvSpPr>
+          <p:cNvPr id="68" name="Text 66"/>
+          <p:cNvSpPr/>
+          <p:nvPr/>
+        </p:nvSpPr>
+        <p:spPr>
+          <a:xfrm>
+            <a:off x="6315456" y="3111318"/>
+            <a:ext cx="2487168" cy="219456"/>
+          </a:xfrm>
+          <a:prstGeom prst="rect">
+            <a:avLst/>
+          </a:prstGeom>
+          <a:noFill/>
+          <a:ln/>
+        </p:spPr>
+        <p:txBody>
+          <a:bodyPr wrap="square" rtlCol="0" anchor="ctr"/>
+          <a:lstStyle/>
+          <a:p>
+            <a:r>
+              <a:rPr lang="en-US" sz="1000" b="1" dirty="0">
+                <a:solidFill>
+                  <a:srgbClr val="248A3D"/>
+                </a:solidFill>
+              </a:rPr>
+              <a:t>✅  RUNTIME TRUST</a:t>
+            </a:r>
+            <a:endParaRPr lang="en-US" sz="1000" dirty="0"/>
+          </a:p>
+        </p:txBody>
+      </p:sp>
+      <p:sp>
+        <p:nvSpPr>
+          <p:cNvPr id="69" name="Text 67"/>
+          <p:cNvSpPr/>
+          <p:nvPr/>
+        </p:nvSpPr>
+        <p:spPr>
+          <a:xfrm>
+            <a:off x="6291072" y="3355158"/>
+            <a:ext cx="2535936" cy="1365504"/>
+          </a:xfrm>
+          <a:prstGeom prst="rect">
+            <a:avLst/>
+          </a:prstGeom>
+          <a:noFill/>
+          <a:ln/>
+        </p:spPr>
+        <p:txBody>
+          <a:bodyPr wrap="square" rtlCol="0" anchor="t"/>
+          <a:lstStyle/>
+          <a:p>
+            <a:r>
+              <a:rPr lang="en-US" sz="1133" dirty="0">
+                <a:solidFill>
+                  <a:srgbClr val="1D1D1F"/>
+                </a:solidFill>
+                <a:latin typeface="Arial" pitchFamily="34" charset="0"/>
+                <a:ea typeface="Arial" pitchFamily="34" charset="-122"/>
+                <a:cs typeface="Arial" pitchFamily="34" charset="-120"/>
+              </a:rPr>
+              <a:t>S0–S3 分類統計一鍵調出。「15 萬筆，S0 89%、S1 9%、S2 1.8%、S3 0.2%，全部附 HMAC 稽核包。」查核 2 週結束。</a:t>
+            </a:r>
+            <a:endParaRPr lang="en-US" sz="1133" dirty="0"/>
+          </a:p>
+        </p:txBody>
+      </p:sp>
+      <p:sp>
+        <p:nvSpPr>
+          <p:cNvPr id="70" name="Shape 68"/>
+          <p:cNvSpPr/>
+          <p:nvPr/>
+        </p:nvSpPr>
+        <p:spPr>
+          <a:xfrm>
+            <a:off x="6291072" y="4793814"/>
+            <a:ext cx="2535936" cy="390144"/>
+          </a:xfrm>
+          <a:prstGeom prst="roundRect">
+            <a:avLst>
+              <a:gd name="adj" fmla="val 50000"/>
+            </a:avLst>
+          </a:prstGeom>
+          <a:solidFill>
+            <a:srgbClr val="34C759"/>
+          </a:solidFill>
+          <a:ln w="12700">
+            <a:solidFill>
+              <a:srgbClr val="34C759"/>
+            </a:solidFill>
+            <a:prstDash val="solid"/>
+          </a:ln>
+          <a:effectLst>
+            <a:outerShdw blurRad="152400" dist="50800" dir="8100000" algn="bl" rotWithShape="0">
+              <a:srgbClr val="000000">
+                <a:alpha val="8000"/>
+              </a:srgbClr>
+            </a:outerShdw>
+          </a:effectLst>
+        </p:spPr>
+        <p:txBody>
+          <a:bodyPr/>
+          <a:lstStyle/>
+          <a:p>
+            <a:endParaRPr lang="zh-TW" altLang="en-US" sz="2400"/>
+          </a:p>
+        </p:txBody>
+      </p:sp>
+      <p:sp>
+        <p:nvSpPr>
+          <p:cNvPr id="71" name="Text 69"/>
+          <p:cNvSpPr/>
+          <p:nvPr/>
+        </p:nvSpPr>
+        <p:spPr>
+          <a:xfrm>
+            <a:off x="6291072" y="4793814"/>
+            <a:ext cx="2535936" cy="390144"/>
+          </a:xfrm>
+          <a:prstGeom prst="rect">
+            <a:avLst/>
+          </a:prstGeom>
+          <a:noFill/>
+          <a:ln/>
+        </p:spPr>
+        <p:txBody>
+          <a:bodyPr wrap="square" rtlCol="0" anchor="ctr"/>
+          <a:lstStyle/>
+          <a:p>
+            <a:pPr algn="ctr"/>
+            <a:r>
+              <a:rPr lang="en-US" sz="1200" b="1" dirty="0">
+                <a:solidFill>
+                  <a:srgbClr val="FFFFFF"/>
+                </a:solidFill>
+                <a:latin typeface="Arial" pitchFamily="34" charset="0"/>
+                <a:ea typeface="Arial" pitchFamily="34" charset="-122"/>
+                <a:cs typeface="Arial" pitchFamily="34" charset="-120"/>
+              </a:rPr>
+              <a:t>查核 6 個月 → 2 週</a:t>
+            </a:r>
+            <a:endParaRPr lang="en-US" sz="1200" dirty="0"/>
+          </a:p>
+        </p:txBody>
+      </p:sp>
+      <p:sp>
+        <p:nvSpPr>
+          <p:cNvPr id="72" name="Shape 70"/>
+          <p:cNvSpPr/>
+          <p:nvPr/>
+        </p:nvSpPr>
+        <p:spPr>
+          <a:xfrm>
+            <a:off x="9070848" y="1217001"/>
+            <a:ext cx="2779776" cy="4754880"/>
+          </a:xfrm>
+          <a:prstGeom prst="roundRect">
+            <a:avLst>
+              <a:gd name="adj" fmla="val 7018"/>
+            </a:avLst>
+          </a:prstGeom>
+          <a:solidFill>
+            <a:srgbClr val="FFFFFF"/>
+          </a:solidFill>
+          <a:ln w="6350">
+            <a:solidFill>
+              <a:srgbClr val="E8E8ED"/>
+            </a:solidFill>
+            <a:prstDash val="solid"/>
+          </a:ln>
+          <a:effectLst>
+            <a:outerShdw blurRad="152400" dist="50800" dir="8100000" algn="bl" rotWithShape="0">
+              <a:srgbClr val="000000">
+                <a:alpha val="8000"/>
+              </a:srgbClr>
+            </a:outerShdw>
+          </a:effectLst>
+        </p:spPr>
+        <p:txBody>
+          <a:bodyPr/>
+          <a:lstStyle/>
+          <a:p>
+            <a:endParaRPr lang="zh-TW" altLang="en-US" sz="2400"/>
+          </a:p>
+        </p:txBody>
+      </p:sp>
+      <p:sp>
+        <p:nvSpPr>
+          <p:cNvPr id="73" name="Shape 71"/>
+          <p:cNvSpPr/>
+          <p:nvPr/>
+        </p:nvSpPr>
+        <p:spPr>
+          <a:xfrm>
+            <a:off x="9070848" y="1217001"/>
+            <a:ext cx="2779776" cy="633984"/>
+          </a:xfrm>
+          <a:prstGeom prst="roundRect">
+            <a:avLst>
+              <a:gd name="adj" fmla="val 30769"/>
+            </a:avLst>
+          </a:prstGeom>
+          <a:solidFill>
+            <a:srgbClr val="F5EEFA"/>
+          </a:solidFill>
+          <a:ln w="12700">
+            <a:solidFill>
+              <a:srgbClr val="F5EEFA"/>
+            </a:solidFill>
+            <a:prstDash val="solid"/>
+          </a:ln>
+          <a:effectLst>
+            <a:outerShdw blurRad="152400" dist="50800" dir="8100000" algn="bl" rotWithShape="0">
+              <a:srgbClr val="000000">
+                <a:alpha val="8000"/>
+              </a:srgbClr>
+            </a:outerShdw>
+          </a:effectLst>
+        </p:spPr>
+        <p:txBody>
+          <a:bodyPr/>
+          <a:lstStyle/>
+          <a:p>
+            <a:endParaRPr lang="zh-TW" altLang="en-US" sz="2400"/>
+          </a:p>
+        </p:txBody>
+      </p:sp>
+      <p:sp>
+        <p:nvSpPr>
+          <p:cNvPr id="74" name="Shape 72"/>
+          <p:cNvSpPr/>
+          <p:nvPr/>
+        </p:nvSpPr>
+        <p:spPr>
+          <a:xfrm>
+            <a:off x="9070848" y="1680297"/>
+            <a:ext cx="2779776" cy="243840"/>
+          </a:xfrm>
+          <a:prstGeom prst="roundRect">
+            <a:avLst>
+              <a:gd name="adj" fmla="val 70000"/>
+            </a:avLst>
+          </a:prstGeom>
+          <a:solidFill>
+            <a:srgbClr val="F5EEFA"/>
+          </a:solidFill>
+          <a:ln w="12700">
+            <a:solidFill>
+              <a:srgbClr val="F5EEFA"/>
+            </a:solidFill>
+            <a:prstDash val="solid"/>
+          </a:ln>
+          <a:effectLst>
+            <a:outerShdw blurRad="152400" dist="50800" dir="8100000" algn="bl" rotWithShape="0">
+              <a:srgbClr val="000000">
+                <a:alpha val="8000"/>
+              </a:srgbClr>
+            </a:outerShdw>
+          </a:effectLst>
+        </p:spPr>
+        <p:txBody>
+          <a:bodyPr/>
+          <a:lstStyle/>
+          <a:p>
+            <a:endParaRPr lang="zh-TW" altLang="en-US" sz="2400"/>
+          </a:p>
+        </p:txBody>
+      </p:sp>
+      <p:sp>
+        <p:nvSpPr>
+          <p:cNvPr id="75" name="Shape 73"/>
+          <p:cNvSpPr/>
+          <p:nvPr/>
+        </p:nvSpPr>
+        <p:spPr>
+          <a:xfrm>
+            <a:off x="9192768" y="1314537"/>
+            <a:ext cx="438912" cy="341376"/>
+          </a:xfrm>
+          <a:prstGeom prst="roundRect">
+            <a:avLst>
+              <a:gd name="adj" fmla="val 50000"/>
+            </a:avLst>
+          </a:prstGeom>
+          <a:solidFill>
+            <a:srgbClr val="AF52DE"/>
+          </a:solidFill>
+          <a:ln w="12700">
+            <a:solidFill>
+              <a:srgbClr val="AF52DE"/>
+            </a:solidFill>
+            <a:prstDash val="solid"/>
+          </a:ln>
+          <a:effectLst>
+            <a:outerShdw blurRad="152400" dist="50800" dir="8100000" algn="bl" rotWithShape="0">
+              <a:srgbClr val="000000">
+                <a:alpha val="8000"/>
+              </a:srgbClr>
+            </a:outerShdw>
+          </a:effectLst>
+        </p:spPr>
+        <p:txBody>
+          <a:bodyPr/>
+          <a:lstStyle/>
+          <a:p>
+            <a:endParaRPr lang="zh-TW" altLang="en-US" sz="2400"/>
+          </a:p>
+        </p:txBody>
+      </p:sp>
+      <p:sp>
+        <p:nvSpPr>
+          <p:cNvPr id="76" name="Text 74"/>
+          <p:cNvSpPr/>
+          <p:nvPr/>
+        </p:nvSpPr>
+        <p:spPr>
+          <a:xfrm>
+            <a:off x="9192768" y="1314537"/>
+            <a:ext cx="438912" cy="341376"/>
+          </a:xfrm>
+          <a:prstGeom prst="rect">
+            <a:avLst/>
+          </a:prstGeom>
+          <a:noFill/>
+          <a:ln/>
+        </p:spPr>
+        <p:txBody>
+          <a:bodyPr wrap="square" rtlCol="0" anchor="ctr"/>
+          <a:lstStyle/>
+          <a:p>
+            <a:pPr algn="ctr"/>
+            <a:r>
+              <a:rPr lang="en-US" sz="1200" b="1" dirty="0">
+                <a:solidFill>
+                  <a:srgbClr val="FFFFFF"/>
+                </a:solidFill>
+              </a:rPr>
+              <a:t>04</a:t>
+            </a:r>
+            <a:endParaRPr lang="en-US" sz="1200" dirty="0"/>
+          </a:p>
+        </p:txBody>
+      </p:sp>
+      <p:sp>
+        <p:nvSpPr>
+          <p:cNvPr id="77" name="Text 75"/>
+          <p:cNvSpPr/>
+          <p:nvPr/>
+        </p:nvSpPr>
+        <p:spPr>
+          <a:xfrm>
+            <a:off x="9704832" y="1302345"/>
+            <a:ext cx="2023872" cy="341376"/>
+          </a:xfrm>
+          <a:prstGeom prst="rect">
+            <a:avLst/>
+          </a:prstGeom>
+          <a:noFill/>
+          <a:ln/>
+        </p:spPr>
+        <p:txBody>
+          <a:bodyPr wrap="square" rtlCol="0" anchor="ctr"/>
+          <a:lstStyle/>
+          <a:p>
+            <a:r>
+              <a:rPr lang="en-US" sz="1733" b="1" dirty="0">
+                <a:solidFill>
+                  <a:srgbClr val="8B3DC0"/>
+                </a:solidFill>
+                <a:latin typeface="Arial" pitchFamily="34" charset="0"/>
+                <a:ea typeface="Arial" pitchFamily="34" charset="-122"/>
+                <a:cs typeface="Arial" pitchFamily="34" charset="-120"/>
+              </a:rPr>
+              <a:t>🌐 文化轉變</a:t>
+            </a:r>
+            <a:endParaRPr lang="en-US" sz="1733" dirty="0"/>
+          </a:p>
+        </p:txBody>
+      </p:sp>
+      <p:sp>
+        <p:nvSpPr>
+          <p:cNvPr id="78" name="Text 76"/>
+          <p:cNvSpPr/>
+          <p:nvPr/>
+        </p:nvSpPr>
+        <p:spPr>
+          <a:xfrm>
+            <a:off x="9192768" y="1680297"/>
+            <a:ext cx="2535936" cy="219456"/>
+          </a:xfrm>
+          <a:prstGeom prst="rect">
+            <a:avLst/>
+          </a:prstGeom>
+          <a:noFill/>
+          <a:ln/>
+        </p:spPr>
+        <p:txBody>
+          <a:bodyPr wrap="square" rtlCol="0" anchor="ctr"/>
+          <a:lstStyle/>
+          <a:p>
+            <a:r>
+              <a:rPr lang="en-US" sz="1000" i="1" dirty="0">
+                <a:solidFill>
+                  <a:srgbClr val="6E6E73"/>
+                </a:solidFill>
+                <a:latin typeface="Arial" pitchFamily="34" charset="0"/>
+                <a:ea typeface="Arial" pitchFamily="34" charset="-122"/>
+                <a:cs typeface="Arial" pitchFamily="34" charset="-120"/>
+              </a:rPr>
+              <a:t>Lloyd's 已為 AI 幻覺定價</a:t>
+            </a:r>
+            <a:endParaRPr lang="en-US" sz="1000" dirty="0"/>
+          </a:p>
+        </p:txBody>
+      </p:sp>
+      <p:sp>
+        <p:nvSpPr>
+          <p:cNvPr id="79" name="Text 77"/>
+          <p:cNvSpPr/>
+          <p:nvPr/>
+        </p:nvSpPr>
+        <p:spPr>
+          <a:xfrm>
+            <a:off x="9192768" y="1948521"/>
+            <a:ext cx="2535936" cy="0"/>
+          </a:xfrm>
+          <a:prstGeom prst="rect">
+            <a:avLst/>
+          </a:prstGeom>
+          <a:noFill/>
+          <a:ln/>
+        </p:spPr>
+        <p:txBody>
+          <a:bodyPr wrap="square" rtlCol="0" anchor="ctr"/>
+          <a:lstStyle/>
+          <a:p>
+            <a:endParaRPr lang="en-US" sz="2400" dirty="0"/>
+          </a:p>
+        </p:txBody>
+      </p:sp>
+      <p:sp>
+        <p:nvSpPr>
+          <p:cNvPr id="80" name="Shape 78"/>
+          <p:cNvSpPr/>
+          <p:nvPr/>
+        </p:nvSpPr>
+        <p:spPr>
+          <a:xfrm>
+            <a:off x="9192768" y="1972905"/>
+            <a:ext cx="2535936" cy="219456"/>
+          </a:xfrm>
+          <a:prstGeom prst="roundRect">
+            <a:avLst>
+              <a:gd name="adj" fmla="val 33333"/>
+            </a:avLst>
+          </a:prstGeom>
+          <a:solidFill>
+            <a:srgbClr val="FFF0EF"/>
+          </a:solidFill>
+          <a:ln w="12700">
+            <a:solidFill>
+              <a:srgbClr val="FFF0EF"/>
+            </a:solidFill>
+            <a:prstDash val="solid"/>
+          </a:ln>
+          <a:effectLst>
+            <a:outerShdw blurRad="152400" dist="50800" dir="8100000" algn="bl" rotWithShape="0">
+              <a:srgbClr val="000000">
+                <a:alpha val="8000"/>
+              </a:srgbClr>
+            </a:outerShdw>
+          </a:effectLst>
+        </p:spPr>
+        <p:txBody>
+          <a:bodyPr/>
+          <a:lstStyle/>
+          <a:p>
+            <a:endParaRPr lang="zh-TW" altLang="en-US" sz="2400"/>
+          </a:p>
+        </p:txBody>
+      </p:sp>
+      <p:sp>
+        <p:nvSpPr>
+          <p:cNvPr id="81" name="Text 79"/>
+          <p:cNvSpPr/>
+          <p:nvPr/>
+        </p:nvSpPr>
+        <p:spPr>
+          <a:xfrm>
+            <a:off x="9217152" y="1972905"/>
+            <a:ext cx="2487168" cy="219456"/>
+          </a:xfrm>
+          <a:prstGeom prst="rect">
+            <a:avLst/>
+          </a:prstGeom>
+          <a:noFill/>
+          <a:ln/>
+        </p:spPr>
+        <p:txBody>
+          <a:bodyPr wrap="square" rtlCol="0" anchor="ctr"/>
+          <a:lstStyle/>
+          <a:p>
+            <a:r>
+              <a:rPr lang="en-US" sz="1000" b="1" dirty="0">
+                <a:solidFill>
+                  <a:srgbClr val="FF3B30"/>
+                </a:solidFill>
+              </a:rPr>
+              <a:t>❌  현재 리스크</a:t>
+            </a:r>
+            <a:endParaRPr lang="en-US" sz="1000" dirty="0"/>
+          </a:p>
+        </p:txBody>
+      </p:sp>
+      <p:sp>
+        <p:nvSpPr>
+          <p:cNvPr id="82" name="Shape 80"/>
+          <p:cNvSpPr/>
+          <p:nvPr/>
+        </p:nvSpPr>
+        <p:spPr>
+          <a:xfrm>
+            <a:off x="9192768" y="1972905"/>
+            <a:ext cx="2535936" cy="219456"/>
+          </a:xfrm>
+          <a:prstGeom prst="roundRect">
+            <a:avLst>
+              <a:gd name="adj" fmla="val 33333"/>
+            </a:avLst>
+          </a:prstGeom>
+          <a:solidFill>
+            <a:srgbClr val="FFF0EF"/>
+          </a:solidFill>
+          <a:ln w="12700">
+            <a:solidFill>
+              <a:srgbClr val="FFF0EF"/>
+            </a:solidFill>
+            <a:prstDash val="solid"/>
+          </a:ln>
+          <a:effectLst>
+            <a:outerShdw blurRad="152400" dist="50800" dir="8100000" algn="bl" rotWithShape="0">
+              <a:srgbClr val="000000">
+                <a:alpha val="8000"/>
+              </a:srgbClr>
+            </a:outerShdw>
+          </a:effectLst>
+        </p:spPr>
+        <p:txBody>
+          <a:bodyPr/>
+          <a:lstStyle/>
+          <a:p>
+            <a:endParaRPr lang="zh-TW" altLang="en-US" sz="2400"/>
+          </a:p>
+        </p:txBody>
+      </p:sp>
+      <p:sp>
+        <p:nvSpPr>
+          <p:cNvPr id="83" name="Text 81"/>
+          <p:cNvSpPr/>
+          <p:nvPr/>
+        </p:nvSpPr>
+        <p:spPr>
+          <a:xfrm>
+            <a:off x="9217152" y="1972905"/>
+            <a:ext cx="2487168" cy="219456"/>
+          </a:xfrm>
+          <a:prstGeom prst="rect">
+            <a:avLst/>
+          </a:prstGeom>
+          <a:noFill/>
+          <a:ln/>
+        </p:spPr>
+        <p:txBody>
+          <a:bodyPr wrap="square" rtlCol="0" anchor="ctr"/>
+          <a:lstStyle/>
+          <a:p>
+            <a:r>
+              <a:rPr lang="en-US" sz="1000" b="1" dirty="0">
+                <a:solidFill>
+                  <a:srgbClr val="FF3B30"/>
+                </a:solidFill>
+              </a:rPr>
+              <a:t>❌  現在的風險</a:t>
+            </a:r>
+            <a:endParaRPr lang="en-US" sz="1000" dirty="0"/>
+          </a:p>
+        </p:txBody>
+      </p:sp>
+      <p:sp>
+        <p:nvSpPr>
+          <p:cNvPr id="84" name="Text 82"/>
+          <p:cNvSpPr/>
+          <p:nvPr/>
+        </p:nvSpPr>
+        <p:spPr>
+          <a:xfrm>
+            <a:off x="9192768" y="2216745"/>
+            <a:ext cx="2535936" cy="1365504"/>
+          </a:xfrm>
+          <a:prstGeom prst="rect">
+            <a:avLst/>
+          </a:prstGeom>
+          <a:noFill/>
+          <a:ln/>
+        </p:spPr>
+        <p:txBody>
+          <a:bodyPr wrap="square" rtlCol="0" anchor="t"/>
+          <a:lstStyle/>
+          <a:p>
+            <a:r>
+              <a:rPr lang="en-US" sz="1133" dirty="0">
+                <a:solidFill>
+                  <a:srgbClr val="1D1D1F"/>
+                </a:solidFill>
+                <a:latin typeface="Arial" pitchFamily="34" charset="0"/>
+                <a:ea typeface="Arial" pitchFamily="34" charset="-122"/>
+                <a:cs typeface="Arial" pitchFamily="34" charset="-120"/>
+              </a:rPr>
+              <a:t>Lloyd's 2025/5 推出 AI 幻覺保險。Scaled Cognition 募資 $1 億做幻覺控制。風控部門開始問：「我們的 AI 有治理機制嗎？」</a:t>
+            </a:r>
+            <a:endParaRPr lang="en-US" sz="1133" dirty="0"/>
+          </a:p>
+        </p:txBody>
+      </p:sp>
+      <p:sp>
+        <p:nvSpPr>
+          <p:cNvPr id="85" name="Shape 83"/>
+          <p:cNvSpPr/>
+          <p:nvPr/>
+        </p:nvSpPr>
+        <p:spPr>
+          <a:xfrm>
+            <a:off x="9192768" y="3038166"/>
+            <a:ext cx="2535936" cy="0"/>
+          </a:xfrm>
+          <a:prstGeom prst="line">
+            <a:avLst/>
+          </a:prstGeom>
+          <a:noFill/>
+          <a:ln w="7620">
+            <a:solidFill>
+              <a:srgbClr val="E8E8ED"/>
+            </a:solidFill>
+            <a:prstDash val="solid"/>
+          </a:ln>
+        </p:spPr>
+        <p:txBody>
+          <a:bodyPr/>
+          <a:lstStyle/>
+          <a:p>
+            <a:endParaRPr lang="zh-TW" altLang="en-US" sz="2400"/>
+          </a:p>
+        </p:txBody>
+      </p:sp>
+      <p:sp>
+        <p:nvSpPr>
+          <p:cNvPr id="86" name="Shape 84"/>
+          <p:cNvSpPr/>
+          <p:nvPr/>
+        </p:nvSpPr>
+        <p:spPr>
+          <a:xfrm>
+            <a:off x="9192768" y="3111318"/>
+            <a:ext cx="2535936" cy="219456"/>
+          </a:xfrm>
+          <a:prstGeom prst="roundRect">
+            <a:avLst>
+              <a:gd name="adj" fmla="val 33333"/>
+            </a:avLst>
+          </a:prstGeom>
+          <a:solidFill>
+            <a:srgbClr val="F5EEFA"/>
+          </a:solidFill>
+          <a:ln w="12700">
+            <a:solidFill>
+              <a:srgbClr val="F5EEFA"/>
+            </a:solidFill>
+            <a:prstDash val="solid"/>
+          </a:ln>
+          <a:effectLst>
+            <a:outerShdw blurRad="152400" dist="50800" dir="8100000" algn="bl" rotWithShape="0">
+              <a:srgbClr val="000000">
+                <a:alpha val="8000"/>
+              </a:srgbClr>
+            </a:outerShdw>
+          </a:effectLst>
+        </p:spPr>
+        <p:txBody>
+          <a:bodyPr/>
+          <a:lstStyle/>
+          <a:p>
+            <a:endParaRPr lang="zh-TW" altLang="en-US" sz="2400"/>
+          </a:p>
+        </p:txBody>
+      </p:sp>
+      <p:sp>
+        <p:nvSpPr>
+          <p:cNvPr id="87" name="Text 85"/>
+          <p:cNvSpPr/>
+          <p:nvPr/>
+        </p:nvSpPr>
+        <p:spPr>
+          <a:xfrm>
+            <a:off x="9217152" y="3111318"/>
+            <a:ext cx="2487168" cy="219456"/>
+          </a:xfrm>
+          <a:prstGeom prst="rect">
+            <a:avLst/>
+          </a:prstGeom>
+          <a:noFill/>
+          <a:ln/>
+        </p:spPr>
+        <p:txBody>
+          <a:bodyPr wrap="square" rtlCol="0" anchor="ctr"/>
+          <a:lstStyle/>
+          <a:p>
+            <a:r>
+              <a:rPr lang="en-US" sz="1000" b="1" dirty="0">
+                <a:solidFill>
+                  <a:srgbClr val="8B3DC0"/>
+                </a:solidFill>
+              </a:rPr>
+              <a:t>✅  RUNTIME TRUST</a:t>
+            </a:r>
+            <a:endParaRPr lang="en-US" sz="1000" dirty="0"/>
+          </a:p>
+        </p:txBody>
+      </p:sp>
+      <p:sp>
+        <p:nvSpPr>
+          <p:cNvPr id="88" name="Text 86"/>
+          <p:cNvSpPr/>
+          <p:nvPr/>
+        </p:nvSpPr>
+        <p:spPr>
+          <a:xfrm>
+            <a:off x="9192768" y="3355158"/>
+            <a:ext cx="2535936" cy="1365504"/>
+          </a:xfrm>
+          <a:prstGeom prst="rect">
+            <a:avLst/>
+          </a:prstGeom>
+          <a:noFill/>
+          <a:ln/>
+        </p:spPr>
+        <p:txBody>
+          <a:bodyPr wrap="square" rtlCol="0" anchor="t"/>
+          <a:lstStyle/>
+          <a:p>
+            <a:r>
+              <a:rPr lang="en-US" sz="1133" dirty="0">
+                <a:solidFill>
+                  <a:srgbClr val="1D1D1F"/>
+                </a:solidFill>
+                <a:latin typeface="Arial" pitchFamily="34" charset="0"/>
+                <a:ea typeface="Arial" pitchFamily="34" charset="-122"/>
+                <a:cs typeface="Arial" pitchFamily="34" charset="-120"/>
+              </a:rPr>
+              <a:t>裝 RUNTIME TRUST：token 層治理證明，保費較低，監管關係更好，出事時法律風險可控。沒裝：Lloyd's 保單越來越難拿。</a:t>
+            </a:r>
+            <a:endParaRPr lang="en-US" sz="1133" dirty="0"/>
+          </a:p>
+        </p:txBody>
+      </p:sp>
+      <p:sp>
+        <p:nvSpPr>
+          <p:cNvPr id="89" name="Shape 87"/>
+          <p:cNvSpPr/>
+          <p:nvPr/>
+        </p:nvSpPr>
+        <p:spPr>
+          <a:xfrm>
+            <a:off x="9192768" y="4793814"/>
+            <a:ext cx="2535936" cy="390144"/>
+          </a:xfrm>
+          <a:prstGeom prst="roundRect">
+            <a:avLst>
+              <a:gd name="adj" fmla="val 50000"/>
+            </a:avLst>
+          </a:prstGeom>
+          <a:solidFill>
+            <a:srgbClr val="AF52DE"/>
+          </a:solidFill>
+          <a:ln w="12700">
+            <a:solidFill>
+              <a:srgbClr val="AF52DE"/>
+            </a:solidFill>
+            <a:prstDash val="solid"/>
+          </a:ln>
+          <a:effectLst>
+            <a:outerShdw blurRad="152400" dist="50800" dir="8100000" algn="bl" rotWithShape="0">
+              <a:srgbClr val="000000">
+                <a:alpha val="8000"/>
+              </a:srgbClr>
+            </a:outerShdw>
+          </a:effectLst>
+        </p:spPr>
+        <p:txBody>
+          <a:bodyPr/>
+          <a:lstStyle/>
+          <a:p>
+            <a:endParaRPr lang="zh-TW" altLang="en-US" sz="2400"/>
+          </a:p>
+        </p:txBody>
+      </p:sp>
+      <p:sp>
+        <p:nvSpPr>
+          <p:cNvPr id="90" name="Text 88"/>
+          <p:cNvSpPr/>
+          <p:nvPr/>
+        </p:nvSpPr>
+        <p:spPr>
+          <a:xfrm>
+            <a:off x="9192768" y="4793814"/>
+            <a:ext cx="2535936" cy="390144"/>
+          </a:xfrm>
+          <a:prstGeom prst="rect">
+            <a:avLst/>
+          </a:prstGeom>
+          <a:noFill/>
+          <a:ln/>
+        </p:spPr>
+        <p:txBody>
+          <a:bodyPr wrap="square" rtlCol="0" anchor="ctr"/>
+          <a:lstStyle/>
+          <a:p>
+            <a:pPr algn="ctr"/>
+            <a:r>
+              <a:rPr lang="en-US" sz="1200" b="1" dirty="0">
+                <a:solidFill>
+                  <a:srgbClr val="FFFFFF"/>
+                </a:solidFill>
+                <a:latin typeface="Arial" pitchFamily="34" charset="0"/>
+                <a:ea typeface="Arial" pitchFamily="34" charset="-122"/>
+                <a:cs typeface="Arial" pitchFamily="34" charset="-120"/>
+              </a:rPr>
+              <a:t>有記錄 = 更低保費</a:t>
+            </a:r>
+            <a:endParaRPr lang="en-US" sz="1200" dirty="0"/>
+          </a:p>
+        </p:txBody>
+      </p:sp>
+      <p:sp>
+        <p:nvSpPr>
+          <p:cNvPr id="91" name="Shape 89"/>
+          <p:cNvSpPr/>
+          <p:nvPr/>
+        </p:nvSpPr>
+        <p:spPr>
+          <a:xfrm>
+            <a:off x="365760" y="6008457"/>
+            <a:ext cx="11460480" cy="268224"/>
+          </a:xfrm>
+          <a:prstGeom prst="roundRect">
+            <a:avLst>
+              <a:gd name="adj" fmla="val 36364"/>
+            </a:avLst>
+          </a:prstGeom>
+          <a:solidFill>
+            <a:srgbClr val="E8E8ED"/>
+          </a:solidFill>
+          <a:ln w="12700">
+            <a:solidFill>
+              <a:srgbClr val="E8E8ED"/>
+            </a:solidFill>
+            <a:prstDash val="solid"/>
+          </a:ln>
+          <a:effectLst>
+            <a:outerShdw blurRad="152400" dist="50800" dir="8100000" algn="bl" rotWithShape="0">
+              <a:srgbClr val="000000">
+                <a:alpha val="8000"/>
+              </a:srgbClr>
+            </a:outerShdw>
+          </a:effectLst>
+        </p:spPr>
+        <p:txBody>
+          <a:bodyPr/>
+          <a:lstStyle/>
+          <a:p>
+            <a:endParaRPr lang="zh-TW" altLang="en-US" sz="2400"/>
+          </a:p>
+        </p:txBody>
+      </p:sp>
+      <p:sp>
+        <p:nvSpPr>
+          <p:cNvPr id="92" name="Text 90"/>
+          <p:cNvSpPr/>
+          <p:nvPr/>
+        </p:nvSpPr>
+        <p:spPr>
+          <a:xfrm>
+            <a:off x="268224" y="6079911"/>
+            <a:ext cx="1463040" cy="268224"/>
+          </a:xfrm>
+          <a:prstGeom prst="rect">
+            <a:avLst/>
+          </a:prstGeom>
+          <a:noFill/>
+          <a:ln/>
+        </p:spPr>
+        <p:txBody>
+          <a:bodyPr wrap="square" rtlCol="0" anchor="ctr"/>
+          <a:lstStyle/>
+          <a:p>
+            <a:r>
+              <a:rPr lang="en-US" sz="1000" b="1" dirty="0">
+                <a:solidFill>
+                  <a:srgbClr val="6E6E73"/>
+                </a:solidFill>
+              </a:rPr>
+              <a:t>競爭者缺口</a:t>
+            </a:r>
+            <a:endParaRPr lang="en-US" sz="1000" dirty="0"/>
+          </a:p>
+        </p:txBody>
+      </p:sp>
+      <p:sp>
+        <p:nvSpPr>
+          <p:cNvPr id="93" name="Text 91"/>
+          <p:cNvSpPr/>
+          <p:nvPr/>
+        </p:nvSpPr>
+        <p:spPr>
+          <a:xfrm>
+            <a:off x="999744" y="6079911"/>
+            <a:ext cx="1828800" cy="268224"/>
+          </a:xfrm>
+          <a:prstGeom prst="rect">
+            <a:avLst/>
+          </a:prstGeom>
+          <a:noFill/>
+          <a:ln/>
+        </p:spPr>
+        <p:txBody>
+          <a:bodyPr wrap="none" rtlCol="0" anchor="ctr"/>
+          <a:lstStyle/>
+          <a:p>
+            <a:r>
+              <a:rPr lang="en-US" sz="1000" b="1" dirty="0">
+                <a:solidFill>
+                  <a:srgbClr val="6E6E73"/>
+                </a:solidFill>
+              </a:rPr>
+              <a:t>Shieldbase  </a:t>
+            </a:r>
+            <a:r>
+              <a:rPr lang="en-US" sz="933" dirty="0">
+                <a:solidFill>
+                  <a:srgbClr val="6E6E73"/>
+                </a:solidFill>
+              </a:rPr>
+              <a:t>管員工用哪些 AI，看不到推論</a:t>
+            </a:r>
+            <a:endParaRPr lang="en-US" sz="1000" dirty="0"/>
+          </a:p>
+        </p:txBody>
+      </p:sp>
+      <p:sp>
+        <p:nvSpPr>
+          <p:cNvPr id="94" name="Text 92"/>
+          <p:cNvSpPr/>
+          <p:nvPr/>
+        </p:nvSpPr>
+        <p:spPr>
+          <a:xfrm>
+            <a:off x="3267456" y="6079911"/>
+            <a:ext cx="1828800" cy="268224"/>
+          </a:xfrm>
+          <a:prstGeom prst="rect">
+            <a:avLst/>
+          </a:prstGeom>
+          <a:noFill/>
+          <a:ln/>
+        </p:spPr>
+        <p:txBody>
+          <a:bodyPr wrap="none" rtlCol="0" anchor="ctr"/>
+          <a:lstStyle/>
+          <a:p>
+            <a:r>
+              <a:rPr lang="en-US" sz="1000" b="1" dirty="0">
+                <a:solidFill>
+                  <a:srgbClr val="CC3377"/>
+                </a:solidFill>
+              </a:rPr>
+              <a:t>HiddenLayer  </a:t>
+            </a:r>
+            <a:r>
+              <a:rPr lang="en-US" sz="933" dirty="0">
+                <a:solidFill>
+                  <a:srgbClr val="6E6E73"/>
+                </a:solidFill>
+              </a:rPr>
+              <a:t>部署前掃描，不攔推論時幻覺</a:t>
+            </a:r>
+            <a:endParaRPr lang="en-US" sz="1000" dirty="0"/>
+          </a:p>
+        </p:txBody>
+      </p:sp>
+      <p:sp>
+        <p:nvSpPr>
+          <p:cNvPr id="95" name="Text 93"/>
+          <p:cNvSpPr/>
+          <p:nvPr/>
+        </p:nvSpPr>
+        <p:spPr>
+          <a:xfrm>
+            <a:off x="5575543" y="6069417"/>
+            <a:ext cx="1682496" cy="268224"/>
+          </a:xfrm>
+          <a:prstGeom prst="rect">
+            <a:avLst/>
+          </a:prstGeom>
+          <a:noFill/>
+          <a:ln/>
+        </p:spPr>
+        <p:txBody>
+          <a:bodyPr wrap="none" rtlCol="0" anchor="ctr"/>
+          <a:lstStyle/>
+          <a:p>
+            <a:r>
+              <a:rPr lang="en-US" sz="1000" b="1" dirty="0">
+                <a:solidFill>
+                  <a:srgbClr val="AF52DE"/>
+                </a:solidFill>
+              </a:rPr>
+              <a:t>WitnessAI  </a:t>
+            </a:r>
+            <a:r>
+              <a:rPr lang="en-US" sz="933" dirty="0">
+                <a:solidFill>
+                  <a:srgbClr val="6E6E73"/>
+                </a:solidFill>
+              </a:rPr>
+              <a:t>攔 API 呼叫，不攔 token 幻覺</a:t>
+            </a:r>
+            <a:endParaRPr lang="en-US" sz="1000" dirty="0"/>
+          </a:p>
+        </p:txBody>
+      </p:sp>
+      <p:sp>
+        <p:nvSpPr>
+          <p:cNvPr id="96" name="Text 94"/>
+          <p:cNvSpPr/>
+          <p:nvPr/>
+        </p:nvSpPr>
+        <p:spPr>
+          <a:xfrm>
+            <a:off x="7813073" y="6079911"/>
+            <a:ext cx="1536192" cy="268224"/>
+          </a:xfrm>
+          <a:prstGeom prst="rect">
+            <a:avLst/>
+          </a:prstGeom>
+          <a:noFill/>
+          <a:ln/>
+        </p:spPr>
+        <p:txBody>
+          <a:bodyPr wrap="none" rtlCol="0" anchor="ctr"/>
+          <a:lstStyle/>
+          <a:p>
+            <a:r>
+              <a:rPr lang="en-US" sz="1000" b="1" dirty="0">
+                <a:solidFill>
+                  <a:srgbClr val="FF9500"/>
+                </a:solidFill>
+              </a:rPr>
+              <a:t>Lasso  </a:t>
+            </a:r>
+            <a:r>
+              <a:rPr lang="en-US" sz="933" dirty="0">
+                <a:solidFill>
+                  <a:srgbClr val="6E6E73"/>
+                </a:solidFill>
+              </a:rPr>
+              <a:t>輸出後過濾，無稽核軌跡</a:t>
+            </a:r>
+            <a:endParaRPr lang="en-US" sz="1000" dirty="0"/>
+          </a:p>
+        </p:txBody>
+      </p:sp>
+      <p:sp>
+        <p:nvSpPr>
+          <p:cNvPr id="97" name="Shape 95"/>
+          <p:cNvSpPr/>
+          <p:nvPr/>
+        </p:nvSpPr>
+        <p:spPr>
+          <a:xfrm>
+            <a:off x="9561727" y="6105597"/>
+            <a:ext cx="2072640" cy="200268"/>
+          </a:xfrm>
+          <a:prstGeom prst="roundRect">
+            <a:avLst>
+              <a:gd name="adj" fmla="val 33333"/>
+            </a:avLst>
+          </a:prstGeom>
+          <a:solidFill>
+            <a:srgbClr val="E8F1FD"/>
+          </a:solidFill>
+          <a:ln w="12700">
+            <a:solidFill>
+              <a:srgbClr val="E8F1FD"/>
+            </a:solidFill>
+            <a:prstDash val="solid"/>
+          </a:ln>
+          <a:effectLst>
+            <a:outerShdw blurRad="152400" dist="50800" dir="8100000" algn="bl" rotWithShape="0">
+              <a:srgbClr val="000000">
+                <a:alpha val="8000"/>
+              </a:srgbClr>
+            </a:outerShdw>
+          </a:effectLst>
+        </p:spPr>
+        <p:txBody>
+          <a:bodyPr/>
+          <a:lstStyle/>
+          <a:p>
+            <a:endParaRPr lang="zh-TW" altLang="en-US" sz="2400"/>
+          </a:p>
+        </p:txBody>
+      </p:sp>
+      <p:sp>
+        <p:nvSpPr>
+          <p:cNvPr id="98" name="Text 96"/>
+          <p:cNvSpPr/>
+          <p:nvPr/>
+        </p:nvSpPr>
+        <p:spPr>
+          <a:xfrm>
+            <a:off x="9497568" y="6055527"/>
+            <a:ext cx="2694432" cy="268224"/>
+          </a:xfrm>
+          <a:prstGeom prst="rect">
+            <a:avLst/>
+          </a:prstGeom>
+          <a:noFill/>
+          <a:ln/>
+        </p:spPr>
+        <p:txBody>
+          <a:bodyPr wrap="none" rtlCol="0" anchor="ctr"/>
+          <a:lstStyle/>
+          <a:p>
+            <a:r>
+              <a:rPr lang="en-US" sz="1000" b="1" dirty="0">
+                <a:solidFill>
+                  <a:srgbClr val="0071E3"/>
+                </a:solidFill>
+              </a:rPr>
+              <a:t>RUNTIME TRUST ★  </a:t>
+            </a:r>
+            <a:r>
+              <a:rPr lang="en-US" sz="933" dirty="0">
+                <a:solidFill>
+                  <a:srgbClr val="0071E3"/>
+                </a:solidFill>
+              </a:rPr>
+              <a:t>唯一在推論瞬間記錄＋攔截</a:t>
+            </a:r>
+            <a:endParaRPr lang="en-US" sz="1000" dirty="0"/>
+          </a:p>
+        </p:txBody>
+      </p:sp>
+      <p:sp>
+        <p:nvSpPr>
+          <p:cNvPr id="99" name="Shape 97"/>
+          <p:cNvSpPr/>
+          <p:nvPr/>
+        </p:nvSpPr>
+        <p:spPr>
+          <a:xfrm>
+            <a:off x="396977" y="5466608"/>
+            <a:ext cx="11460480" cy="414528"/>
+          </a:xfrm>
+          <a:prstGeom prst="roundRect">
+            <a:avLst>
+              <a:gd name="adj" fmla="val 35294"/>
+            </a:avLst>
+          </a:prstGeom>
+          <a:solidFill>
+            <a:srgbClr val="0071E3"/>
+          </a:solidFill>
+          <a:ln w="12700">
+            <a:solidFill>
+              <a:srgbClr val="0071E3"/>
+            </a:solidFill>
+            <a:prstDash val="solid"/>
+          </a:ln>
+          <a:effectLst>
+            <a:outerShdw blurRad="152400" dist="50800" dir="8100000" algn="bl" rotWithShape="0">
+              <a:srgbClr val="000000">
+                <a:alpha val="8000"/>
+              </a:srgbClr>
+            </a:outerShdw>
+          </a:effectLst>
+        </p:spPr>
+        <p:txBody>
+          <a:bodyPr/>
+          <a:lstStyle/>
+          <a:p>
+            <a:endParaRPr lang="zh-TW" altLang="en-US" sz="2400"/>
+          </a:p>
+        </p:txBody>
+      </p:sp>
+      <p:sp>
+        <p:nvSpPr>
+          <p:cNvPr id="100" name="Text 98"/>
+          <p:cNvSpPr/>
+          <p:nvPr/>
+        </p:nvSpPr>
+        <p:spPr>
+          <a:xfrm>
+            <a:off x="446415" y="5483357"/>
+            <a:ext cx="11119104" cy="414528"/>
+          </a:xfrm>
+          <a:prstGeom prst="rect">
+            <a:avLst/>
+          </a:prstGeom>
+          <a:noFill/>
+          <a:ln/>
+        </p:spPr>
+        <p:txBody>
+          <a:bodyPr wrap="square" rtlCol="0" anchor="ctr"/>
+          <a:lstStyle/>
+          <a:p>
+            <a:r>
+              <a:rPr lang="en-US" sz="1267" b="1" dirty="0">
+                <a:solidFill>
+                  <a:srgbClr val="FFFFFF"/>
+                </a:solidFill>
+              </a:rPr>
+              <a:t>RUNTIME TRUST 三個 ROI：</a:t>
+            </a:r>
+            <a:r>
+              <a:rPr lang="en-US" sz="1200" dirty="0">
+                <a:solidFill>
+                  <a:srgbClr val="C8E0FF"/>
+                </a:solidFill>
+              </a:rPr>
+              <a:t>  ① 降低保費（Lloyd's：有記錄 = 低風險）  ·  ② 加速查核（6 個月 → 2 週）  ·  ③ 阻斷 AML 攻擊（&lt; 20μs 熔斷）</a:t>
+            </a:r>
+            <a:r>
+              <a:rPr lang="en-US" sz="1267" b="1" dirty="0">
+                <a:solidFill>
+                  <a:srgbClr val="FFFFFF"/>
+                </a:solidFill>
+              </a:rPr>
+              <a:t>  ·  一個工具，三個 ROI。</a:t>
+            </a:r>
+            <a:endParaRPr lang="en-US" sz="1267" dirty="0"/>
+          </a:p>
+        </p:txBody>
+      </p:sp>
+    </p:spTree>
+  </p:cSld>
+  <p:clrMapOvr>
+    <a:masterClrMapping/>
+  </p:clrMapOvr>
+</p:sld>
+</file>
+
+<file path=ppt/slides/slide5.xml><?xml version="1.0" encoding="utf-8"?>
+<p:sld xmlns:a="http://schemas.openxmlformats.org/drawingml/2006/main" xmlns:r="http://schemas.openxmlformats.org/officeDocument/2006/relationships" xmlns:p="http://schemas.openxmlformats.org/presentationml/2006/main">
   <p:cSld name="Slide 4">
     <p:bg>
       <p:bgPr>
@@ -7888,7 +11686,7 @@
 </p:sld>
 </file>
 
-<file path=ppt/slides/slide5.xml><?xml version="1.0" encoding="utf-8"?>
+<file path=ppt/slides/slide6.xml><?xml version="1.0" encoding="utf-8"?>
 <p:sld xmlns:a="http://schemas.openxmlformats.org/drawingml/2006/main" xmlns:r="http://schemas.openxmlformats.org/officeDocument/2006/relationships" xmlns:p="http://schemas.openxmlformats.org/presentationml/2006/main">
   <p:cSld name="Slide 5">
     <p:bg>
@@ -8131,7 +11929,7 @@
               <a:buNone/>
             </a:pPr>
             <a:r>
-              <a:rPr lang="en-US" sz="1050" dirty="0">
+              <a:rPr lang="en-US" sz="1050" dirty="0" err="1">
                 <a:solidFill>
                   <a:srgbClr val="5B6584"/>
                 </a:solidFill>
@@ -8139,7 +11937,48 @@
                 <a:ea typeface="Calibri" pitchFamily="34" charset="-122"/>
                 <a:cs typeface="Calibri" pitchFamily="34" charset="-120"/>
               </a:rPr>
-              <a:t>地區銀行、中型銀行、證券、保險、金融科技、金融 SI 與私有 LLM 導入團隊。</a:t>
+              <a:t>地區銀行、中型銀行、證券、保險、金融科技</a:t>
+            </a:r>
+            <a:r>
+              <a:rPr lang="en-US" sz="1050" dirty="0">
+                <a:solidFill>
+                  <a:srgbClr val="5B6584"/>
+                </a:solidFill>
+                <a:latin typeface="Calibri" pitchFamily="34" charset="0"/>
+                <a:ea typeface="Calibri" pitchFamily="34" charset="-122"/>
+                <a:cs typeface="Calibri" pitchFamily="34" charset="-120"/>
+              </a:rPr>
+              <a:t>、</a:t>
+            </a:r>
+          </a:p>
+          <a:p>
+            <a:pPr marL="0" indent="0">
+              <a:lnSpc>
+                <a:spcPct val="125000"/>
+              </a:lnSpc>
+              <a:buNone/>
+            </a:pPr>
+            <a:r>
+              <a:rPr lang="en-US" sz="1050" dirty="0" err="1">
+                <a:solidFill>
+                  <a:srgbClr val="5B6584"/>
+                </a:solidFill>
+                <a:latin typeface="Calibri" pitchFamily="34" charset="0"/>
+                <a:ea typeface="Calibri" pitchFamily="34" charset="-122"/>
+                <a:cs typeface="Calibri" pitchFamily="34" charset="-120"/>
+              </a:rPr>
+              <a:t>金融</a:t>
+            </a:r>
+            <a:r>
+              <a:rPr lang="en-US" sz="1050" dirty="0">
+                <a:solidFill>
+                  <a:srgbClr val="5B6584"/>
+                </a:solidFill>
+                <a:latin typeface="Calibri" pitchFamily="34" charset="0"/>
+                <a:ea typeface="Calibri" pitchFamily="34" charset="-122"/>
+                <a:cs typeface="Calibri" pitchFamily="34" charset="-120"/>
+              </a:rPr>
+              <a:t> SI 與私有 LLM 導入團隊。</a:t>
             </a:r>
             <a:endParaRPr lang="en-US" sz="1050" dirty="0"/>
           </a:p>
@@ -8488,7 +12327,7 @@
                 <a:ea typeface="Cambria" pitchFamily="34" charset="-122"/>
                 <a:cs typeface="Cambria" pitchFamily="34" charset="-120"/>
               </a:rPr>
-              <a:t>20 家</a:t>
+              <a:t>200 家</a:t>
             </a:r>
             <a:endParaRPr lang="en-US" sz="2100" dirty="0"/>
           </a:p>
@@ -9196,7 +13035,7 @@
 </p:sld>
 </file>
 
-<file path=ppt/slides/slide6.xml><?xml version="1.0" encoding="utf-8"?>
+<file path=ppt/slides/slide7.xml><?xml version="1.0" encoding="utf-8"?>
 <p:sld xmlns:a="http://schemas.openxmlformats.org/drawingml/2006/main" xmlns:r="http://schemas.openxmlformats.org/officeDocument/2006/relationships" xmlns:p="http://schemas.openxmlformats.org/presentationml/2006/main">
   <p:cSld name="Slide 6">
     <p:bg>
